--- a/Project_Presentation_Review_2.pptx
+++ b/Project_Presentation_Review_2.pptx
@@ -3175,7 +3175,7 @@
                 <a:solidFill>
                   <a:srgbClr val="0F2557"/>
                 </a:solidFill>
-                <a:latin typeface="Segoe UI"/>
+                <a:latin typeface="Times New Roman"/>
               </a:defRPr>
             </a:pPr>
             <a:r>
@@ -3192,7 +3192,7 @@
         </p:nvSpPr>
         <p:spPr>
           <a:xfrm>
-            <a:off x="548640" y="1188720"/>
+            <a:off x="548640" y="1143000"/>
             <a:ext cx="11094415" cy="1463040"/>
           </a:xfrm>
           <a:prstGeom prst="rect">
@@ -3241,8 +3241,8 @@
         </p:nvSpPr>
         <p:spPr>
           <a:xfrm>
-            <a:off x="365760" y="2834640"/>
-            <a:ext cx="11460175" cy="3657600"/>
+            <a:off x="365760" y="2788920"/>
+            <a:ext cx="11460175" cy="3703320"/>
           </a:xfrm>
           <a:prstGeom prst="rect">
             <a:avLst/>
@@ -3284,8 +3284,8 @@
         </p:nvSpPr>
         <p:spPr>
           <a:xfrm>
-            <a:off x="914400" y="2971800"/>
-            <a:ext cx="10362895" cy="548640"/>
+            <a:off x="731520" y="2926080"/>
+            <a:ext cx="10728655" cy="548640"/>
           </a:xfrm>
           <a:prstGeom prst="rect">
             <a:avLst/>
@@ -3303,7 +3303,7 @@
                 <a:solidFill>
                   <a:srgbClr val="FFFFFF"/>
                 </a:solidFill>
-                <a:latin typeface="Segoe UI"/>
+                <a:latin typeface="Times New Roman"/>
               </a:defRPr>
             </a:pPr>
             <a:r>
@@ -3316,7 +3316,7 @@
                 <a:solidFill>
                   <a:srgbClr val="FFFFFF"/>
                 </a:solidFill>
-                <a:latin typeface="Segoe UI"/>
+                <a:latin typeface="Times New Roman"/>
               </a:defRPr>
             </a:pPr>
             <a:r>
@@ -3333,7 +3333,7 @@
         </p:nvSpPr>
         <p:spPr>
           <a:xfrm>
-            <a:off x="914400" y="3749039"/>
+            <a:off x="914400" y="3657600"/>
             <a:ext cx="4572000" cy="1645920"/>
           </a:xfrm>
           <a:prstGeom prst="rect">
@@ -3352,7 +3352,7 @@
                 <a:solidFill>
                   <a:srgbClr val="FFFFFF"/>
                 </a:solidFill>
-                <a:latin typeface="Segoe UI"/>
+                <a:latin typeface="Times New Roman"/>
               </a:defRPr>
             </a:pPr>
             <a:r>
@@ -3365,7 +3365,7 @@
                 <a:solidFill>
                   <a:srgbClr val="FFFFFF"/>
                 </a:solidFill>
-                <a:latin typeface="Segoe UI"/>
+                <a:latin typeface="Times New Roman"/>
               </a:defRPr>
             </a:pPr>
             <a:r>
@@ -3378,7 +3378,7 @@
                 <a:solidFill>
                   <a:srgbClr val="FFFFFF"/>
                 </a:solidFill>
-                <a:latin typeface="Segoe UI"/>
+                <a:latin typeface="Times New Roman"/>
               </a:defRPr>
             </a:pPr>
             <a:r>
@@ -3395,7 +3395,7 @@
         </p:nvSpPr>
         <p:spPr>
           <a:xfrm>
-            <a:off x="6583680" y="3749039"/>
+            <a:off x="6583680" y="3657600"/>
             <a:ext cx="5029200" cy="1645920"/>
           </a:xfrm>
           <a:prstGeom prst="rect">
@@ -3414,7 +3414,7 @@
                 <a:solidFill>
                   <a:srgbClr val="FFFFFF"/>
                 </a:solidFill>
-                <a:latin typeface="Segoe UI"/>
+                <a:latin typeface="Times New Roman"/>
               </a:defRPr>
             </a:pPr>
             <a:r>
@@ -3427,7 +3427,7 @@
                 <a:solidFill>
                   <a:srgbClr val="FFFFFF"/>
                 </a:solidFill>
-                <a:latin typeface="Segoe UI"/>
+                <a:latin typeface="Times New Roman"/>
               </a:defRPr>
             </a:pPr>
             <a:r>
@@ -3440,7 +3440,7 @@
                 <a:solidFill>
                   <a:srgbClr val="FFFFFF"/>
                 </a:solidFill>
-                <a:latin typeface="Segoe UI"/>
+                <a:latin typeface="Times New Roman"/>
               </a:defRPr>
             </a:pPr>
             <a:r>
@@ -3453,7 +3453,7 @@
                 <a:solidFill>
                   <a:srgbClr val="FFFFFF"/>
                 </a:solidFill>
-                <a:latin typeface="Segoe UI"/>
+                <a:latin typeface="Times New Roman"/>
               </a:defRPr>
             </a:pPr>
             <a:r>
@@ -3470,8 +3470,8 @@
         </p:nvSpPr>
         <p:spPr>
           <a:xfrm>
-            <a:off x="914400" y="5623560"/>
-            <a:ext cx="10362895" cy="731520"/>
+            <a:off x="731520" y="5623560"/>
+            <a:ext cx="10728655" cy="731520"/>
           </a:xfrm>
           <a:prstGeom prst="rect">
             <a:avLst/>
@@ -3489,7 +3489,7 @@
                 <a:solidFill>
                   <a:srgbClr val="FFFFFF"/>
                 </a:solidFill>
-                <a:latin typeface="Segoe UI"/>
+                <a:latin typeface="Times New Roman"/>
               </a:defRPr>
             </a:pPr>
             <a:r>
@@ -3502,7 +3502,7 @@
                 <a:solidFill>
                   <a:srgbClr val="FFFFFF"/>
                 </a:solidFill>
-                <a:latin typeface="Segoe UI"/>
+                <a:latin typeface="Times New Roman"/>
               </a:defRPr>
             </a:pPr>
             <a:r>
@@ -3678,7 +3678,7 @@
             <a:avLst/>
           </a:prstGeom>
           <a:solidFill>
-            <a:srgbClr val="9CA3AF"/>
+            <a:srgbClr val="A0A0A0"/>
           </a:solidFill>
           <a:ln>
             <a:noFill/>
@@ -3715,7 +3715,7 @@
         <p:spPr>
           <a:xfrm>
             <a:off x="365760" y="868680"/>
-            <a:ext cx="11460175" cy="621792"/>
+            <a:ext cx="11460175" cy="594360"/>
           </a:xfrm>
           <a:prstGeom prst="rect">
             <a:avLst/>
@@ -3750,7 +3750,7 @@
                 <a:solidFill>
                   <a:srgbClr val="FFFFFF"/>
                 </a:solidFill>
-                <a:latin typeface="Segoe UI"/>
+                <a:latin typeface="Times New Roman"/>
               </a:defRPr>
             </a:pPr>
             <a:r>
@@ -3784,9 +3784,9 @@
             <a:pPr>
               <a:defRPr sz="1000">
                 <a:solidFill>
-                  <a:srgbClr val="64748B"/>
-                </a:solidFill>
-                <a:latin typeface="Segoe UI"/>
+                  <a:srgbClr val="6B7280"/>
+                </a:solidFill>
+                <a:latin typeface="Times New Roman"/>
               </a:defRPr>
             </a:pPr>
             <a:r>
@@ -3820,9 +3820,9 @@
             <a:pPr algn="r">
               <a:defRPr sz="1000">
                 <a:solidFill>
-                  <a:srgbClr val="64748B"/>
-                </a:solidFill>
-                <a:latin typeface="Segoe UI"/>
+                  <a:srgbClr val="6B7280"/>
+                </a:solidFill>
+                <a:latin typeface="Times New Roman"/>
               </a:defRPr>
             </a:pPr>
             <a:r>
@@ -3833,51 +3833,32 @@
       </p:sp>
       <p:sp>
         <p:nvSpPr>
-          <p:cNvPr id="10" name="Rectangle 9"/>
-          <p:cNvSpPr/>
-          <p:nvPr/>
-        </p:nvSpPr>
-        <p:spPr>
-          <a:xfrm>
-            <a:off x="548640" y="1645920"/>
-            <a:ext cx="11094415" cy="594360"/>
-          </a:xfrm>
-          <a:prstGeom prst="rect">
-            <a:avLst/>
-          </a:prstGeom>
-          <a:solidFill>
-            <a:srgbClr val="F8FAFC"/>
-          </a:solidFill>
-          <a:ln w="12700">
-            <a:solidFill>
-              <a:srgbClr val="2563EB"/>
-            </a:solidFill>
-          </a:ln>
-        </p:spPr>
-        <p:style>
-          <a:lnRef idx="1">
-            <a:schemeClr val="accent1"/>
-          </a:lnRef>
-          <a:fillRef idx="3">
-            <a:schemeClr val="accent1"/>
-          </a:fillRef>
-          <a:effectRef idx="2">
-            <a:schemeClr val="accent1"/>
-          </a:effectRef>
-          <a:fontRef idx="minor">
-            <a:schemeClr val="lt1"/>
-          </a:fontRef>
-        </p:style>
-        <p:txBody>
-          <a:bodyPr rtlCol="0" anchor="ctr"/>
-          <a:lstStyle/>
-          <a:p>
-            <a:pPr algn="ctr">
+          <p:cNvPr id="10" name="TextBox 9"/>
+          <p:cNvSpPr txBox="1"/>
+          <p:nvPr/>
+        </p:nvSpPr>
+        <p:spPr>
+          <a:xfrm>
+            <a:off x="548640" y="1600200"/>
+            <a:ext cx="11094415" cy="365760"/>
+          </a:xfrm>
+          <a:prstGeom prst="rect">
+            <a:avLst/>
+          </a:prstGeom>
+          <a:noFill/>
+        </p:spPr>
+        <p:txBody>
+          <a:bodyPr wrap="none">
+            <a:spAutoFit/>
+          </a:bodyPr>
+          <a:lstStyle/>
+          <a:p>
+            <a:pPr>
               <a:defRPr sz="1100" i="1">
                 <a:solidFill>
                   <a:srgbClr val="0F2557"/>
                 </a:solidFill>
-                <a:latin typeface="Segoe UI"/>
+                <a:latin typeface="Times New Roman"/>
               </a:defRPr>
             </a:pPr>
             <a:r>
@@ -3895,8 +3876,8 @@
           <p:nvPr/>
         </p:nvGraphicFramePr>
         <p:xfrm>
-          <a:off x="548640" y="2377440"/>
-          <a:ext cx="11094415" cy="2926080"/>
+          <a:off x="548640" y="2057400"/>
+          <a:ext cx="11094415" cy="3017520"/>
         </p:xfrm>
         <a:graphic>
           <a:graphicData uri="http://schemas.openxmlformats.org/drawingml/2006/table">
@@ -3905,14 +3886,14 @@
                 <a:tableStyleId>{5C22544A-7EE6-4342-B048-85BDC9FD1C3A}</a:tableStyleId>
               </a:tblPr>
               <a:tblGrid>
-                <a:gridCol w="548640"/>
-                <a:gridCol w="2743200"/>
+                <a:gridCol w="640080"/>
+                <a:gridCol w="2834640"/>
                 <a:gridCol w="1645920"/>
-                <a:gridCol w="2468880"/>
+                <a:gridCol w="2377440"/>
                 <a:gridCol w="1828800"/>
-                <a:gridCol w="1858975"/>
+                <a:gridCol w="1767535"/>
               </a:tblGrid>
-              <a:tr h="487680">
+              <a:tr h="502920">
                 <a:tc>
                   <a:txBody>
                     <a:bodyPr/>
@@ -3923,7 +3904,7 @@
                           <a:solidFill>
                             <a:srgbClr val="FFFFFF"/>
                           </a:solidFill>
-                          <a:latin typeface="Segoe UI"/>
+                          <a:latin typeface="Times New Roman"/>
                         </a:defRPr>
                       </a:pPr>
                       <a:r>
@@ -3947,7 +3928,7 @@
                           <a:solidFill>
                             <a:srgbClr val="FFFFFF"/>
                           </a:solidFill>
-                          <a:latin typeface="Segoe UI"/>
+                          <a:latin typeface="Times New Roman"/>
                         </a:defRPr>
                       </a:pPr>
                       <a:r>
@@ -3971,7 +3952,7 @@
                           <a:solidFill>
                             <a:srgbClr val="FFFFFF"/>
                           </a:solidFill>
-                          <a:latin typeface="Segoe UI"/>
+                          <a:latin typeface="Times New Roman"/>
                         </a:defRPr>
                       </a:pPr>
                       <a:r>
@@ -3995,11 +3976,11 @@
                           <a:solidFill>
                             <a:srgbClr val="FFFFFF"/>
                           </a:solidFill>
-                          <a:latin typeface="Segoe UI"/>
+                          <a:latin typeface="Times New Roman"/>
                         </a:defRPr>
                       </a:pPr>
                       <a:r>
-                        <a:t>Specification / Tool</a:t>
+                        <a:t>Specification / Tool Details</a:t>
                       </a:r>
                     </a:p>
                   </a:txBody>
@@ -4019,7 +4000,7 @@
                           <a:solidFill>
                             <a:srgbClr val="FFFFFF"/>
                           </a:solidFill>
-                          <a:latin typeface="Segoe UI"/>
+                          <a:latin typeface="Times New Roman"/>
                         </a:defRPr>
                       </a:pPr>
                       <a:r>
@@ -4043,7 +4024,7 @@
                           <a:solidFill>
                             <a:srgbClr val="FFFFFF"/>
                           </a:solidFill>
-                          <a:latin typeface="Segoe UI"/>
+                          <a:latin typeface="Times New Roman"/>
                         </a:defRPr>
                       </a:pPr>
                       <a:r>
@@ -4058,7 +4039,7 @@
                   </a:tcPr>
                 </a:tc>
               </a:tr>
-              <a:tr h="487680">
+              <a:tr h="502920">
                 <a:tc>
                   <a:txBody>
                     <a:bodyPr/>
@@ -4067,9 +4048,9 @@
                       <a:pPr algn="ctr">
                         <a:defRPr sz="1000">
                           <a:solidFill>
-                            <a:srgbClr val="1E293B"/>
+                            <a:srgbClr val="1F2937"/>
                           </a:solidFill>
-                          <a:latin typeface="Segoe UI"/>
+                          <a:latin typeface="Calibri"/>
                         </a:defRPr>
                       </a:pPr>
                       <a:r>
@@ -4091,9 +4072,9 @@
                       <a:pPr>
                         <a:defRPr sz="1000">
                           <a:solidFill>
-                            <a:srgbClr val="1E293B"/>
+                            <a:srgbClr val="1F2937"/>
                           </a:solidFill>
-                          <a:latin typeface="Segoe UI"/>
+                          <a:latin typeface="Calibri"/>
                         </a:defRPr>
                       </a:pPr>
                       <a:r>
@@ -4115,9 +4096,9 @@
                       <a:pPr algn="ctr">
                         <a:defRPr sz="1000">
                           <a:solidFill>
-                            <a:srgbClr val="1E293B"/>
+                            <a:srgbClr val="1F2937"/>
                           </a:solidFill>
-                          <a:latin typeface="Segoe UI"/>
+                          <a:latin typeface="Calibri"/>
                         </a:defRPr>
                       </a:pPr>
                       <a:r>
@@ -4139,13 +4120,13 @@
                       <a:pPr>
                         <a:defRPr sz="1000">
                           <a:solidFill>
-                            <a:srgbClr val="1E293B"/>
+                            <a:srgbClr val="1F2937"/>
                           </a:solidFill>
-                          <a:latin typeface="Segoe UI"/>
+                          <a:latin typeface="Calibri"/>
                         </a:defRPr>
                       </a:pPr>
                       <a:r>
-                        <a:t>ML Standard Edition v2025.2 (Free Academic)</a:t>
+                        <a:t>ML Standard Edition (v2025.2) Academic License</a:t>
                       </a:r>
                     </a:p>
                   </a:txBody>
@@ -4163,13 +4144,13 @@
                       <a:pPr algn="ctr">
                         <a:defRPr sz="1000">
                           <a:solidFill>
-                            <a:srgbClr val="1E293B"/>
+                            <a:srgbClr val="1F2937"/>
                           </a:solidFill>
-                          <a:latin typeface="Segoe UI"/>
+                          <a:latin typeface="Calibri"/>
                         </a:defRPr>
                       </a:pPr>
                       <a:r>
-                        <a:t>₹0.00</a:t>
+                        <a:t>₹0.00 (Free Academic)</a:t>
                       </a:r>
                     </a:p>
                   </a:txBody>
@@ -4187,9 +4168,9 @@
                       <a:pPr algn="ctr">
                         <a:defRPr sz="1000">
                           <a:solidFill>
-                            <a:srgbClr val="1E293B"/>
+                            <a:srgbClr val="1F2937"/>
                           </a:solidFill>
-                          <a:latin typeface="Segoe UI"/>
+                          <a:latin typeface="Calibri"/>
                         </a:defRPr>
                       </a:pPr>
                       <a:r>
@@ -4204,7 +4185,7 @@
                   </a:tcPr>
                 </a:tc>
               </a:tr>
-              <a:tr h="487680">
+              <a:tr h="502920">
                 <a:tc>
                   <a:txBody>
                     <a:bodyPr/>
@@ -4213,9 +4194,9 @@
                       <a:pPr algn="ctr">
                         <a:defRPr sz="1000">
                           <a:solidFill>
-                            <a:srgbClr val="1E293B"/>
+                            <a:srgbClr val="1F2937"/>
                           </a:solidFill>
-                          <a:latin typeface="Segoe UI"/>
+                          <a:latin typeface="Calibri"/>
                         </a:defRPr>
                       </a:pPr>
                       <a:r>
@@ -4237,13 +4218,13 @@
                       <a:pPr>
                         <a:defRPr sz="1000">
                           <a:solidFill>
-                            <a:srgbClr val="1E293B"/>
+                            <a:srgbClr val="1F2937"/>
                           </a:solidFill>
-                          <a:latin typeface="Segoe UI"/>
+                          <a:latin typeface="Calibri"/>
                         </a:defRPr>
                       </a:pPr>
                       <a:r>
-                        <a:t>RTL Simulator &amp; Test Suite</a:t>
+                        <a:t>RTL Simulator &amp; Test Environment</a:t>
                       </a:r>
                     </a:p>
                   </a:txBody>
@@ -4261,9 +4242,9 @@
                       <a:pPr algn="ctr">
                         <a:defRPr sz="1000">
                           <a:solidFill>
-                            <a:srgbClr val="1E293B"/>
+                            <a:srgbClr val="1F2937"/>
                           </a:solidFill>
-                          <a:latin typeface="Segoe UI"/>
+                          <a:latin typeface="Calibri"/>
                         </a:defRPr>
                       </a:pPr>
                       <a:r>
@@ -4285,9 +4266,9 @@
                       <a:pPr>
                         <a:defRPr sz="1000">
                           <a:solidFill>
-                            <a:srgbClr val="1E293B"/>
+                            <a:srgbClr val="1F2937"/>
                           </a:solidFill>
-                          <a:latin typeface="Segoe UI"/>
+                          <a:latin typeface="Calibri"/>
                         </a:defRPr>
                       </a:pPr>
                       <a:r>
@@ -4309,13 +4290,13 @@
                       <a:pPr algn="ctr">
                         <a:defRPr sz="1000">
                           <a:solidFill>
-                            <a:srgbClr val="1E293B"/>
+                            <a:srgbClr val="1F2937"/>
                           </a:solidFill>
-                          <a:latin typeface="Segoe UI"/>
+                          <a:latin typeface="Calibri"/>
                         </a:defRPr>
                       </a:pPr>
                       <a:r>
-                        <a:t>₹0.00</a:t>
+                        <a:t>₹0.00 (Built-in / Open)</a:t>
                       </a:r>
                     </a:p>
                   </a:txBody>
@@ -4333,9 +4314,9 @@
                       <a:pPr algn="ctr">
                         <a:defRPr sz="1000">
                           <a:solidFill>
-                            <a:srgbClr val="1E293B"/>
+                            <a:srgbClr val="1F2937"/>
                           </a:solidFill>
-                          <a:latin typeface="Segoe UI"/>
+                          <a:latin typeface="Calibri"/>
                         </a:defRPr>
                       </a:pPr>
                       <a:r>
@@ -4350,7 +4331,7 @@
                   </a:tcPr>
                 </a:tc>
               </a:tr>
-              <a:tr h="487680">
+              <a:tr h="502920">
                 <a:tc>
                   <a:txBody>
                     <a:bodyPr/>
@@ -4359,9 +4340,9 @@
                       <a:pPr algn="ctr">
                         <a:defRPr sz="1000">
                           <a:solidFill>
-                            <a:srgbClr val="1E293B"/>
+                            <a:srgbClr val="1F2937"/>
                           </a:solidFill>
-                          <a:latin typeface="Segoe UI"/>
+                          <a:latin typeface="Calibri"/>
                         </a:defRPr>
                       </a:pPr>
                       <a:r>
@@ -4383,9 +4364,9 @@
                       <a:pPr>
                         <a:defRPr sz="1000">
                           <a:solidFill>
-                            <a:srgbClr val="1E293B"/>
+                            <a:srgbClr val="1F2937"/>
                           </a:solidFill>
-                          <a:latin typeface="Segoe UI"/>
+                          <a:latin typeface="Calibri"/>
                         </a:defRPr>
                       </a:pPr>
                       <a:r>
@@ -4407,9 +4388,9 @@
                       <a:pPr algn="ctr">
                         <a:defRPr sz="1000">
                           <a:solidFill>
-                            <a:srgbClr val="1E293B"/>
+                            <a:srgbClr val="1F2937"/>
                           </a:solidFill>
-                          <a:latin typeface="Segoe UI"/>
+                          <a:latin typeface="Calibri"/>
                         </a:defRPr>
                       </a:pPr>
                       <a:r>
@@ -4431,9 +4412,9 @@
                       <a:pPr>
                         <a:defRPr sz="1000">
                           <a:solidFill>
-                            <a:srgbClr val="1E293B"/>
+                            <a:srgbClr val="1F2937"/>
                           </a:solidFill>
-                          <a:latin typeface="Segoe UI"/>
+                          <a:latin typeface="Calibri"/>
                         </a:defRPr>
                       </a:pPr>
                       <a:r>
@@ -4455,13 +4436,13 @@
                       <a:pPr algn="ctr">
                         <a:defRPr sz="1000">
                           <a:solidFill>
-                            <a:srgbClr val="1E293B"/>
+                            <a:srgbClr val="1F2937"/>
                           </a:solidFill>
-                          <a:latin typeface="Segoe UI"/>
+                          <a:latin typeface="Calibri"/>
                         </a:defRPr>
                       </a:pPr>
                       <a:r>
-                        <a:t>₹0.00</a:t>
+                        <a:t>₹0.00 (Lab Facility)</a:t>
                       </a:r>
                     </a:p>
                   </a:txBody>
@@ -4479,9 +4460,9 @@
                       <a:pPr algn="ctr">
                         <a:defRPr sz="1000">
                           <a:solidFill>
-                            <a:srgbClr val="1E293B"/>
+                            <a:srgbClr val="1F2937"/>
                           </a:solidFill>
-                          <a:latin typeface="Segoe UI"/>
+                          <a:latin typeface="Calibri"/>
                         </a:defRPr>
                       </a:pPr>
                       <a:r>
@@ -4496,7 +4477,7 @@
                   </a:tcPr>
                 </a:tc>
               </a:tr>
-              <a:tr h="487680">
+              <a:tr h="502920">
                 <a:tc>
                   <a:txBody>
                     <a:bodyPr/>
@@ -4505,9 +4486,9 @@
                       <a:pPr algn="ctr">
                         <a:defRPr sz="1000">
                           <a:solidFill>
-                            <a:srgbClr val="1E293B"/>
+                            <a:srgbClr val="1F2937"/>
                           </a:solidFill>
-                          <a:latin typeface="Segoe UI"/>
+                          <a:latin typeface="Calibri"/>
                         </a:defRPr>
                       </a:pPr>
                       <a:r>
@@ -4529,9 +4510,9 @@
                       <a:pPr>
                         <a:defRPr sz="1000">
                           <a:solidFill>
-                            <a:srgbClr val="1E293B"/>
+                            <a:srgbClr val="1F2937"/>
                           </a:solidFill>
-                          <a:latin typeface="Segoe UI"/>
+                          <a:latin typeface="Calibri"/>
                         </a:defRPr>
                       </a:pPr>
                       <a:r>
@@ -4553,9 +4534,9 @@
                       <a:pPr algn="ctr">
                         <a:defRPr sz="1000">
                           <a:solidFill>
-                            <a:srgbClr val="1E293B"/>
+                            <a:srgbClr val="1F2937"/>
                           </a:solidFill>
-                          <a:latin typeface="Segoe UI"/>
+                          <a:latin typeface="Calibri"/>
                         </a:defRPr>
                       </a:pPr>
                       <a:r>
@@ -4577,9 +4558,9 @@
                       <a:pPr>
                         <a:defRPr sz="1000">
                           <a:solidFill>
-                            <a:srgbClr val="1E293B"/>
+                            <a:srgbClr val="1F2937"/>
                           </a:solidFill>
-                          <a:latin typeface="Segoe UI"/>
+                          <a:latin typeface="Calibri"/>
                         </a:defRPr>
                       </a:pPr>
                       <a:r>
@@ -4601,13 +4582,13 @@
                       <a:pPr algn="ctr">
                         <a:defRPr sz="1000">
                           <a:solidFill>
-                            <a:srgbClr val="1E293B"/>
+                            <a:srgbClr val="1F2937"/>
                           </a:solidFill>
-                          <a:latin typeface="Segoe UI"/>
+                          <a:latin typeface="Calibri"/>
                         </a:defRPr>
                       </a:pPr>
                       <a:r>
-                        <a:t>₹0.00</a:t>
+                        <a:t>₹0.00 (Software Phase)</a:t>
                       </a:r>
                     </a:p>
                   </a:txBody>
@@ -4625,9 +4606,9 @@
                       <a:pPr algn="ctr">
                         <a:defRPr sz="1000">
                           <a:solidFill>
-                            <a:srgbClr val="1E293B"/>
+                            <a:srgbClr val="1F2937"/>
                           </a:solidFill>
-                          <a:latin typeface="Segoe UI"/>
+                          <a:latin typeface="Calibri"/>
                         </a:defRPr>
                       </a:pPr>
                       <a:r>
@@ -4642,7 +4623,7 @@
                   </a:tcPr>
                 </a:tc>
               </a:tr>
-              <a:tr h="487680">
+              <a:tr h="502920">
                 <a:tc>
                   <a:txBody>
                     <a:bodyPr/>
@@ -4651,9 +4632,9 @@
                       <a:pPr algn="ctr">
                         <a:defRPr sz="1000">
                           <a:solidFill>
-                            <a:srgbClr val="1E293B"/>
+                            <a:srgbClr val="1F2937"/>
                           </a:solidFill>
-                          <a:latin typeface="Segoe UI"/>
+                          <a:latin typeface="Calibri"/>
                         </a:defRPr>
                       </a:pPr>
                       <a:r>
@@ -4675,9 +4656,9 @@
                       <a:pPr>
                         <a:defRPr sz="1000">
                           <a:solidFill>
-                            <a:srgbClr val="1E293B"/>
+                            <a:srgbClr val="1F2937"/>
                           </a:solidFill>
-                          <a:latin typeface="Segoe UI"/>
+                          <a:latin typeface="Calibri"/>
                         </a:defRPr>
                       </a:pPr>
                       <a:r>
@@ -4699,9 +4680,9 @@
                       <a:pPr algn="ctr">
                         <a:defRPr sz="1000">
                           <a:solidFill>
-                            <a:srgbClr val="1E293B"/>
+                            <a:srgbClr val="1F2937"/>
                           </a:solidFill>
-                          <a:latin typeface="Segoe UI"/>
+                          <a:latin typeface="Calibri"/>
                         </a:defRPr>
                       </a:pPr>
                       <a:r>
@@ -4723,9 +4704,9 @@
                       <a:pPr>
                         <a:defRPr sz="1000">
                           <a:solidFill>
-                            <a:srgbClr val="1E293B"/>
+                            <a:srgbClr val="1F2937"/>
                           </a:solidFill>
-                          <a:latin typeface="Segoe UI"/>
+                          <a:latin typeface="Calibri"/>
                         </a:defRPr>
                       </a:pPr>
                       <a:r>
@@ -4747,13 +4728,13 @@
                       <a:pPr algn="ctr">
                         <a:defRPr sz="1000">
                           <a:solidFill>
-                            <a:srgbClr val="1E293B"/>
+                            <a:srgbClr val="1F2937"/>
                           </a:solidFill>
-                          <a:latin typeface="Segoe UI"/>
+                          <a:latin typeface="Calibri"/>
                         </a:defRPr>
                       </a:pPr>
                       <a:r>
-                        <a:t>₹0.00</a:t>
+                        <a:t>₹0.00 (Software Phase)</a:t>
                       </a:r>
                     </a:p>
                   </a:txBody>
@@ -4771,9 +4752,9 @@
                       <a:pPr algn="ctr">
                         <a:defRPr sz="1000">
                           <a:solidFill>
-                            <a:srgbClr val="1E293B"/>
+                            <a:srgbClr val="1F2937"/>
                           </a:solidFill>
-                          <a:latin typeface="Segoe UI"/>
+                          <a:latin typeface="Calibri"/>
                         </a:defRPr>
                       </a:pPr>
                       <a:r>
@@ -4794,136 +4775,68 @@
       </p:graphicFrame>
       <p:sp>
         <p:nvSpPr>
-          <p:cNvPr id="12" name="Rounded Rectangle 11"/>
-          <p:cNvSpPr/>
-          <p:nvPr/>
-        </p:nvSpPr>
-        <p:spPr>
-          <a:xfrm>
-            <a:off x="548640" y="5486400"/>
-            <a:ext cx="5394960" cy="777240"/>
-          </a:xfrm>
-          <a:prstGeom prst="roundRect">
-            <a:avLst/>
-          </a:prstGeom>
-          <a:solidFill>
-            <a:srgbClr val="ECFDF5"/>
-          </a:solidFill>
-          <a:ln w="19050">
-            <a:solidFill>
-              <a:srgbClr val="166534"/>
-            </a:solidFill>
-          </a:ln>
-        </p:spPr>
-        <p:style>
-          <a:lnRef idx="1">
-            <a:schemeClr val="accent1"/>
-          </a:lnRef>
-          <a:fillRef idx="3">
-            <a:schemeClr val="accent1"/>
-          </a:fillRef>
-          <a:effectRef idx="2">
-            <a:schemeClr val="accent1"/>
-          </a:effectRef>
-          <a:fontRef idx="minor">
-            <a:schemeClr val="lt1"/>
-          </a:fontRef>
-        </p:style>
-        <p:txBody>
-          <a:bodyPr rtlCol="0" anchor="ctr" lIns="182880" tIns="109728"/>
-          <a:lstStyle/>
-          <a:p>
-            <a:pPr algn="ctr">
-              <a:defRPr sz="1300" b="1">
-                <a:solidFill>
-                  <a:srgbClr val="166534"/>
-                </a:solidFill>
-                <a:latin typeface="Segoe UI"/>
-              </a:defRPr>
-            </a:pPr>
-            <a:r>
-              <a:t>TOTAL MONEY SPENT TILL REVIEW-2: ₹0.00</a:t>
-            </a:r>
-          </a:p>
+          <p:cNvPr id="12" name="TextBox 11"/>
+          <p:cNvSpPr txBox="1"/>
+          <p:nvPr/>
+        </p:nvSpPr>
+        <p:spPr>
+          <a:xfrm>
+            <a:off x="548640" y="5303520"/>
+            <a:ext cx="11094415" cy="914400"/>
+          </a:xfrm>
+          <a:prstGeom prst="rect">
+            <a:avLst/>
+          </a:prstGeom>
+          <a:noFill/>
+        </p:spPr>
+        <p:txBody>
+          <a:bodyPr wrap="none">
+            <a:spAutoFit/>
+          </a:bodyPr>
+          <a:lstStyle/>
           <a:p>
             <a:pPr>
-              <a:defRPr sz="1000">
-                <a:solidFill>
-                  <a:srgbClr val="1E293B"/>
-                </a:solidFill>
-                <a:latin typeface="Segoe UI"/>
-              </a:defRPr>
-            </a:pPr>
-            <a:r>
-              <a:t>100% of milestones completed via software-based EDA simulation &amp; synthesis.</a:t>
-            </a:r>
-          </a:p>
-        </p:txBody>
-      </p:sp>
-      <p:sp>
-        <p:nvSpPr>
-          <p:cNvPr id="13" name="Rounded Rectangle 12"/>
-          <p:cNvSpPr/>
-          <p:nvPr/>
-        </p:nvSpPr>
-        <p:spPr>
-          <a:xfrm>
-            <a:off x="6217920" y="5486400"/>
-            <a:ext cx="5394960" cy="777240"/>
-          </a:xfrm>
-          <a:prstGeom prst="roundRect">
-            <a:avLst/>
-          </a:prstGeom>
-          <a:solidFill>
-            <a:srgbClr val="FEF3C7"/>
-          </a:solidFill>
-          <a:ln w="19050">
-            <a:solidFill>
-              <a:srgbClr val="B45309"/>
-            </a:solidFill>
-          </a:ln>
-        </p:spPr>
-        <p:style>
-          <a:lnRef idx="1">
-            <a:schemeClr val="accent1"/>
-          </a:lnRef>
-          <a:fillRef idx="3">
-            <a:schemeClr val="accent1"/>
-          </a:fillRef>
-          <a:effectRef idx="2">
-            <a:schemeClr val="accent1"/>
-          </a:effectRef>
-          <a:fontRef idx="minor">
-            <a:schemeClr val="lt1"/>
-          </a:fontRef>
-        </p:style>
-        <p:txBody>
-          <a:bodyPr rtlCol="0" anchor="ctr" lIns="182880" tIns="109728"/>
-          <a:lstStyle/>
-          <a:p>
-            <a:pPr algn="ctr">
-              <a:defRPr sz="1300" b="1">
-                <a:solidFill>
-                  <a:srgbClr val="B45309"/>
-                </a:solidFill>
-                <a:latin typeface="Segoe UI"/>
-              </a:defRPr>
-            </a:pPr>
-            <a:r>
-              <a:t>TOTAL PROPOSED BUDGET (FUTURE REVISION): ₹28,500.00</a:t>
-            </a:r>
-          </a:p>
-          <a:p>
-            <a:pPr>
-              <a:defRPr sz="1000">
-                <a:solidFill>
-                  <a:srgbClr val="1E293B"/>
-                </a:solidFill>
-                <a:latin typeface="Segoe UI"/>
-              </a:defRPr>
-            </a:pPr>
-            <a:r>
-              <a:t>Estimated for physical board procurement &amp; laboratory RF measurement setup.</a:t>
+              <a:spcAft>
+                <a:spcPts val="600"/>
+              </a:spcAft>
+            </a:pPr>
+            <a:r>
+              <a:rPr sz="1300" b="1">
+                <a:solidFill>
+                  <a:srgbClr val="15803D"/>
+                </a:solidFill>
+                <a:latin typeface="Times New Roman"/>
+              </a:rPr>
+              <a:t>• Total Money Spent Till Date (Review-2): ₹0.00</a:t>
+            </a:r>
+            <a:r>
+              <a:rPr sz="1150">
+                <a:solidFill>
+                  <a:srgbClr val="1F2937"/>
+                </a:solidFill>
+                <a:latin typeface="Calibri"/>
+              </a:rPr>
+              <a:t> — 100% of milestones completed via software-based EDA simulation &amp; synthesis.</a:t>
+            </a:r>
+          </a:p>
+          <a:p>
+            <a:r>
+              <a:rPr sz="1300" b="1">
+                <a:solidFill>
+                  <a:srgbClr val="0F2557"/>
+                </a:solidFill>
+                <a:latin typeface="Times New Roman"/>
+              </a:rPr>
+              <a:t>• Total Proposed Budget (Future Revision): ₹28,500.00</a:t>
+            </a:r>
+            <a:r>
+              <a:rPr sz="1150">
+                <a:solidFill>
+                  <a:srgbClr val="1F2937"/>
+                </a:solidFill>
+                <a:latin typeface="Calibri"/>
+              </a:rPr>
+              <a:t> — Estimated for physical FPGA development board &amp; laboratory RF measurement setup.</a:t>
             </a:r>
           </a:p>
         </p:txBody>
@@ -5095,7 +5008,7 @@
             <a:avLst/>
           </a:prstGeom>
           <a:solidFill>
-            <a:srgbClr val="9CA3AF"/>
+            <a:srgbClr val="A0A0A0"/>
           </a:solidFill>
           <a:ln>
             <a:noFill/>
@@ -5132,7 +5045,7 @@
         <p:spPr>
           <a:xfrm>
             <a:off x="365760" y="868680"/>
-            <a:ext cx="11460175" cy="621792"/>
+            <a:ext cx="11460175" cy="594360"/>
           </a:xfrm>
           <a:prstGeom prst="rect">
             <a:avLst/>
@@ -5167,7 +5080,7 @@
                 <a:solidFill>
                   <a:srgbClr val="FFFFFF"/>
                 </a:solidFill>
-                <a:latin typeface="Segoe UI"/>
+                <a:latin typeface="Times New Roman"/>
               </a:defRPr>
             </a:pPr>
             <a:r>
@@ -5201,9 +5114,9 @@
             <a:pPr>
               <a:defRPr sz="1000">
                 <a:solidFill>
-                  <a:srgbClr val="64748B"/>
-                </a:solidFill>
-                <a:latin typeface="Segoe UI"/>
+                  <a:srgbClr val="6B7280"/>
+                </a:solidFill>
+                <a:latin typeface="Times New Roman"/>
               </a:defRPr>
             </a:pPr>
             <a:r>
@@ -5237,9 +5150,9 @@
             <a:pPr algn="r">
               <a:defRPr sz="1000">
                 <a:solidFill>
-                  <a:srgbClr val="64748B"/>
-                </a:solidFill>
-                <a:latin typeface="Segoe UI"/>
+                  <a:srgbClr val="6B7280"/>
+                </a:solidFill>
+                <a:latin typeface="Times New Roman"/>
               </a:defRPr>
             </a:pPr>
             <a:r>
@@ -5250,340 +5163,215 @@
       </p:sp>
       <p:sp>
         <p:nvSpPr>
-          <p:cNvPr id="10" name="Rounded Rectangle 9"/>
-          <p:cNvSpPr/>
+          <p:cNvPr id="10" name="TextBox 9"/>
+          <p:cNvSpPr txBox="1"/>
           <p:nvPr/>
         </p:nvSpPr>
         <p:spPr>
           <a:xfrm>
             <a:off x="548640" y="1645920"/>
-            <a:ext cx="11094415" cy="804672"/>
-          </a:xfrm>
-          <a:prstGeom prst="roundRect">
-            <a:avLst/>
-          </a:prstGeom>
-          <a:solidFill>
-            <a:srgbClr val="F8FAFC"/>
-          </a:solidFill>
-          <a:ln w="15240">
-            <a:solidFill>
-              <a:srgbClr val="0F2557"/>
-            </a:solidFill>
-          </a:ln>
-        </p:spPr>
-        <p:style>
-          <a:lnRef idx="1">
-            <a:schemeClr val="accent1"/>
-          </a:lnRef>
-          <a:fillRef idx="3">
-            <a:schemeClr val="accent1"/>
-          </a:fillRef>
-          <a:effectRef idx="2">
-            <a:schemeClr val="accent1"/>
-          </a:effectRef>
-          <a:fontRef idx="minor">
-            <a:schemeClr val="lt1"/>
-          </a:fontRef>
-        </p:style>
-        <p:txBody>
-          <a:bodyPr rtlCol="0" anchor="ctr" wrap="square" lIns="182880" tIns="73152"/>
-          <a:lstStyle/>
-          <a:p>
-            <a:pPr algn="ctr">
-              <a:defRPr sz="1300" b="1">
-                <a:solidFill>
-                  <a:srgbClr val="2563EB"/>
-                </a:solidFill>
-                <a:latin typeface="Segoe UI"/>
-              </a:defRPr>
-            </a:pPr>
-            <a:r>
-              <a:t>Task 1: Autonomous On-Chip PRNG Integration (Weeks 1–2)</a:t>
-            </a:r>
-          </a:p>
+            <a:ext cx="11094415" cy="4663440"/>
+          </a:xfrm>
+          <a:prstGeom prst="rect">
+            <a:avLst/>
+          </a:prstGeom>
+          <a:noFill/>
+        </p:spPr>
+        <p:txBody>
+          <a:bodyPr wrap="square">
+            <a:spAutoFit/>
+          </a:bodyPr>
+          <a:lstStyle/>
           <a:p>
             <a:pPr>
-              <a:defRPr sz="1100">
-                <a:solidFill>
-                  <a:srgbClr val="1E293B"/>
-                </a:solidFill>
-                <a:latin typeface="Segoe UI"/>
-              </a:defRPr>
-            </a:pPr>
-            <a:r>
-              <a:t>Integrate an on-chip 128-bit hardware Pseudo-Random Number Generator (LFSR or Xorshift128+) into the AES datapath to generate and refresh independent random masks cycle-by-cycle without external testbench feed dependencies.</a:t>
-            </a:r>
-          </a:p>
-        </p:txBody>
-      </p:sp>
-      <p:sp>
-        <p:nvSpPr>
-          <p:cNvPr id="11" name="Rounded Rectangle 10"/>
-          <p:cNvSpPr/>
-          <p:nvPr/>
-        </p:nvSpPr>
-        <p:spPr>
-          <a:xfrm>
-            <a:off x="548640" y="2560320"/>
-            <a:ext cx="11094415" cy="804672"/>
-          </a:xfrm>
-          <a:prstGeom prst="roundRect">
-            <a:avLst/>
-          </a:prstGeom>
-          <a:solidFill>
-            <a:srgbClr val="F8FAFC"/>
-          </a:solidFill>
-          <a:ln w="15240">
-            <a:solidFill>
-              <a:srgbClr val="0F2557"/>
-            </a:solidFill>
-          </a:ln>
-        </p:spPr>
-        <p:style>
-          <a:lnRef idx="1">
-            <a:schemeClr val="accent1"/>
-          </a:lnRef>
-          <a:fillRef idx="3">
-            <a:schemeClr val="accent1"/>
-          </a:fillRef>
-          <a:effectRef idx="2">
-            <a:schemeClr val="accent1"/>
-          </a:effectRef>
-          <a:fontRef idx="minor">
-            <a:schemeClr val="lt1"/>
-          </a:fontRef>
-        </p:style>
-        <p:txBody>
-          <a:bodyPr rtlCol="0" anchor="ctr" wrap="square" lIns="182880" tIns="73152"/>
-          <a:lstStyle/>
-          <a:p>
-            <a:pPr algn="ctr">
-              <a:defRPr sz="1300" b="1">
-                <a:solidFill>
-                  <a:srgbClr val="2563EB"/>
-                </a:solidFill>
-                <a:latin typeface="Segoe UI"/>
-              </a:defRPr>
-            </a:pPr>
-            <a:r>
-              <a:t>Task 2: Glitch-Resistant Composite-Field Canright S-Box (Weeks 3–4)</a:t>
+              <a:spcAft>
+                <a:spcPts val="200"/>
+              </a:spcAft>
+            </a:pPr>
+            <a:r>
+              <a:rPr sz="1300" b="1">
+                <a:solidFill>
+                  <a:srgbClr val="0F2557"/>
+                </a:solidFill>
+                <a:latin typeface="Times New Roman"/>
+              </a:rPr>
+              <a:t>• Phase 1: Autonomous On-Chip PRNG Integration (Weeks 1–2):</a:t>
             </a:r>
           </a:p>
           <a:p>
             <a:pPr>
-              <a:defRPr sz="1100">
-                <a:solidFill>
-                  <a:srgbClr val="1E293B"/>
-                </a:solidFill>
-                <a:latin typeface="Segoe UI"/>
-              </a:defRPr>
-            </a:pPr>
-            <a:r>
-              <a:t>Replace memory-based S-boxes with Canright composite-field GF((2^4)^2) arithmetic to suppress dynamic CMOS glitch-induced transient power leakage during Galois field non-linear inversions.</a:t>
-            </a:r>
-          </a:p>
-        </p:txBody>
-      </p:sp>
-      <p:sp>
-        <p:nvSpPr>
-          <p:cNvPr id="12" name="Rounded Rectangle 11"/>
-          <p:cNvSpPr/>
-          <p:nvPr/>
-        </p:nvSpPr>
-        <p:spPr>
-          <a:xfrm>
-            <a:off x="548640" y="3474720"/>
-            <a:ext cx="11094415" cy="804672"/>
-          </a:xfrm>
-          <a:prstGeom prst="roundRect">
-            <a:avLst/>
-          </a:prstGeom>
-          <a:solidFill>
-            <a:srgbClr val="F8FAFC"/>
-          </a:solidFill>
-          <a:ln w="15240">
-            <a:solidFill>
-              <a:srgbClr val="0F2557"/>
-            </a:solidFill>
-          </a:ln>
-        </p:spPr>
-        <p:style>
-          <a:lnRef idx="1">
-            <a:schemeClr val="accent1"/>
-          </a:lnRef>
-          <a:fillRef idx="3">
-            <a:schemeClr val="accent1"/>
-          </a:fillRef>
-          <a:effectRef idx="2">
-            <a:schemeClr val="accent1"/>
-          </a:effectRef>
-          <a:fontRef idx="minor">
-            <a:schemeClr val="lt1"/>
-          </a:fontRef>
-        </p:style>
-        <p:txBody>
-          <a:bodyPr rtlCol="0" anchor="ctr" wrap="square" lIns="182880" tIns="73152"/>
-          <a:lstStyle/>
-          <a:p>
-            <a:pPr algn="ctr">
-              <a:defRPr sz="1300" b="1">
-                <a:solidFill>
-                  <a:srgbClr val="2563EB"/>
-                </a:solidFill>
-                <a:latin typeface="Segoe UI"/>
-              </a:defRPr>
-            </a:pPr>
-            <a:r>
-              <a:t>Task 3: Power-Trace Simulation &amp; Welch's t-test / TVLA (Weeks 5–6)</a:t>
+              <a:spcAft>
+                <a:spcPts val="200"/>
+              </a:spcAft>
+            </a:pPr>
+            <a:r>
+              <a:rPr sz="1100">
+                <a:solidFill>
+                  <a:srgbClr val="1F2937"/>
+                </a:solidFill>
+                <a:latin typeface="Calibri"/>
+              </a:rPr>
+              <a:t>– Integrate a dedicated 128-bit hardware Pseudo-Random Number Generator (LFSR / Xorshift128+) directly into the cryptographic datapath.</a:t>
             </a:r>
           </a:p>
           <a:p>
             <a:pPr>
-              <a:defRPr sz="1100">
-                <a:solidFill>
-                  <a:srgbClr val="1E293B"/>
-                </a:solidFill>
-                <a:latin typeface="Segoe UI"/>
-              </a:defRPr>
-            </a:pPr>
-            <a:r>
-              <a:t>Extract cycle-accurate switching activity files (.vcd / .saif) from Vivado post-implementation timing simulations and compute Welch's t-test (Test Vector Leakage Assessment) statistics to verify |t| &lt; 4.5.</a:t>
-            </a:r>
-          </a:p>
-        </p:txBody>
-      </p:sp>
-      <p:sp>
-        <p:nvSpPr>
-          <p:cNvPr id="13" name="Rounded Rectangle 12"/>
-          <p:cNvSpPr/>
-          <p:nvPr/>
-        </p:nvSpPr>
-        <p:spPr>
-          <a:xfrm>
-            <a:off x="548640" y="4389120"/>
-            <a:ext cx="11094415" cy="804672"/>
-          </a:xfrm>
-          <a:prstGeom prst="roundRect">
-            <a:avLst/>
-          </a:prstGeom>
-          <a:solidFill>
-            <a:srgbClr val="F8FAFC"/>
-          </a:solidFill>
-          <a:ln w="15240">
-            <a:solidFill>
-              <a:srgbClr val="0F2557"/>
-            </a:solidFill>
-          </a:ln>
-        </p:spPr>
-        <p:style>
-          <a:lnRef idx="1">
-            <a:schemeClr val="accent1"/>
-          </a:lnRef>
-          <a:fillRef idx="3">
-            <a:schemeClr val="accent1"/>
-          </a:fillRef>
-          <a:effectRef idx="2">
-            <a:schemeClr val="accent1"/>
-          </a:effectRef>
-          <a:fontRef idx="minor">
-            <a:schemeClr val="lt1"/>
-          </a:fontRef>
-        </p:style>
-        <p:txBody>
-          <a:bodyPr rtlCol="0" anchor="ctr" wrap="square" lIns="182880" tIns="73152"/>
-          <a:lstStyle/>
-          <a:p>
-            <a:pPr algn="ctr">
-              <a:defRPr sz="1300" b="1">
-                <a:solidFill>
-                  <a:srgbClr val="2563EB"/>
-                </a:solidFill>
-                <a:latin typeface="Segoe UI"/>
-              </a:defRPr>
-            </a:pPr>
-            <a:r>
-              <a:t>Task 4: Physical FPGA Hardware Prototyping (Weeks 7–8)</a:t>
+              <a:spcAft>
+                <a:spcPts val="1000"/>
+              </a:spcAft>
+            </a:pPr>
+            <a:r>
+              <a:rPr sz="1100">
+                <a:solidFill>
+                  <a:srgbClr val="1F2937"/>
+                </a:solidFill>
+                <a:latin typeface="Calibri"/>
+              </a:rPr>
+              <a:t>– Generate and refresh independent random masks internally on-chip cycle-by-cycle, eliminating external testbench feed dependencies.</a:t>
             </a:r>
           </a:p>
           <a:p>
             <a:pPr>
-              <a:defRPr sz="1100">
-                <a:solidFill>
-                  <a:srgbClr val="1E293B"/>
-                </a:solidFill>
-                <a:latin typeface="Segoe UI"/>
-              </a:defRPr>
-            </a:pPr>
-            <a:r>
-              <a:t>Once a physical FPGA development board is procured in future revisions, integrate an on-chip communication interface (UART/AXI) to bridge host data and program the bitstream for laboratory board-level measurements.</a:t>
-            </a:r>
-          </a:p>
-        </p:txBody>
-      </p:sp>
-      <p:sp>
-        <p:nvSpPr>
-          <p:cNvPr id="14" name="Rounded Rectangle 13"/>
-          <p:cNvSpPr/>
-          <p:nvPr/>
-        </p:nvSpPr>
-        <p:spPr>
-          <a:xfrm>
-            <a:off x="548640" y="5303520"/>
-            <a:ext cx="11094415" cy="804672"/>
-          </a:xfrm>
-          <a:prstGeom prst="roundRect">
-            <a:avLst/>
-          </a:prstGeom>
-          <a:solidFill>
-            <a:srgbClr val="F8FAFC"/>
-          </a:solidFill>
-          <a:ln w="15240">
-            <a:solidFill>
-              <a:srgbClr val="0F2557"/>
-            </a:solidFill>
-          </a:ln>
-        </p:spPr>
-        <p:style>
-          <a:lnRef idx="1">
-            <a:schemeClr val="accent1"/>
-          </a:lnRef>
-          <a:fillRef idx="3">
-            <a:schemeClr val="accent1"/>
-          </a:fillRef>
-          <a:effectRef idx="2">
-            <a:schemeClr val="accent1"/>
-          </a:effectRef>
-          <a:fontRef idx="minor">
-            <a:schemeClr val="lt1"/>
-          </a:fontRef>
-        </p:style>
-        <p:txBody>
-          <a:bodyPr rtlCol="0" anchor="ctr" wrap="square" lIns="182880" tIns="73152"/>
-          <a:lstStyle/>
-          <a:p>
-            <a:pPr algn="ctr">
-              <a:defRPr sz="1300" b="1">
-                <a:solidFill>
-                  <a:srgbClr val="2563EB"/>
-                </a:solidFill>
-                <a:latin typeface="Segoe UI"/>
-              </a:defRPr>
-            </a:pPr>
-            <a:r>
-              <a:t>Task 5: Final Dissertation, Documentation &amp; Defense Preparation</a:t>
+              <a:spcAft>
+                <a:spcPts val="200"/>
+              </a:spcAft>
+            </a:pPr>
+            <a:r>
+              <a:rPr sz="1300" b="1">
+                <a:solidFill>
+                  <a:srgbClr val="0F2557"/>
+                </a:solidFill>
+                <a:latin typeface="Times New Roman"/>
+              </a:rPr>
+              <a:t>• Phase 2: Glitch-Resistant Composite-Field Canright S-Box (Weeks 3–4):</a:t>
             </a:r>
           </a:p>
           <a:p>
             <a:pPr>
-              <a:defRPr sz="1100">
-                <a:solidFill>
-                  <a:srgbClr val="1E293B"/>
-                </a:solidFill>
-                <a:latin typeface="Segoe UI"/>
-              </a:defRPr>
-            </a:pPr>
-            <a:r>
-              <a:t>Consolidate experimental synthesis benchmarks, complete the final B.Tech project dissertation, and prepare the project viva presentation and demonstration.</a:t>
+              <a:spcAft>
+                <a:spcPts val="200"/>
+              </a:spcAft>
+            </a:pPr>
+            <a:r>
+              <a:rPr sz="1100">
+                <a:solidFill>
+                  <a:srgbClr val="1F2937"/>
+                </a:solidFill>
+                <a:latin typeface="Calibri"/>
+              </a:rPr>
+              <a:t>– Replace memory-based S-box lookup tables with Canright composite-field GF(((2^2)^2)^2) algebraic inversion logic.</a:t>
+            </a:r>
+          </a:p>
+          <a:p>
+            <a:pPr>
+              <a:spcAft>
+                <a:spcPts val="1000"/>
+              </a:spcAft>
+            </a:pPr>
+            <a:r>
+              <a:rPr sz="1100">
+                <a:solidFill>
+                  <a:srgbClr val="1F2937"/>
+                </a:solidFill>
+                <a:latin typeface="Calibri"/>
+              </a:rPr>
+              <a:t>– Suppress dynamic CMOS combinatorial glitches and signal delay skews that cause transient first-order side-channel leakage.</a:t>
+            </a:r>
+          </a:p>
+          <a:p>
+            <a:pPr>
+              <a:spcAft>
+                <a:spcPts val="200"/>
+              </a:spcAft>
+            </a:pPr>
+            <a:r>
+              <a:rPr sz="1300" b="1">
+                <a:solidFill>
+                  <a:srgbClr val="0F2557"/>
+                </a:solidFill>
+                <a:latin typeface="Times New Roman"/>
+              </a:rPr>
+              <a:t>• Phase 3: Switching Activity Simulation &amp; TVLA Assessment (Weeks 5–6):</a:t>
+            </a:r>
+          </a:p>
+          <a:p>
+            <a:pPr>
+              <a:spcAft>
+                <a:spcPts val="200"/>
+              </a:spcAft>
+            </a:pPr>
+            <a:r>
+              <a:rPr sz="1100">
+                <a:solidFill>
+                  <a:srgbClr val="1F2937"/>
+                </a:solidFill>
+                <a:latin typeface="Calibri"/>
+              </a:rPr>
+              <a:t>– Extract cycle-accurate switching activity files (.vcd / .saif) from Vivado post-implementation timing simulations.</a:t>
+            </a:r>
+          </a:p>
+          <a:p>
+            <a:pPr>
+              <a:spcAft>
+                <a:spcPts val="1000"/>
+              </a:spcAft>
+            </a:pPr>
+            <a:r>
+              <a:rPr sz="1100">
+                <a:solidFill>
+                  <a:srgbClr val="1F2937"/>
+                </a:solidFill>
+                <a:latin typeface="Calibri"/>
+              </a:rPr>
+              <a:t>– Implement Welch's t-test (Test Vector Leakage Assessment) to statistically confirm leakage suppression below the standard threshold (|t| &lt; 4.5).</a:t>
+            </a:r>
+          </a:p>
+          <a:p>
+            <a:pPr>
+              <a:spcAft>
+                <a:spcPts val="200"/>
+              </a:spcAft>
+            </a:pPr>
+            <a:r>
+              <a:rPr sz="1300" b="1">
+                <a:solidFill>
+                  <a:srgbClr val="0F2557"/>
+                </a:solidFill>
+                <a:latin typeface="Times New Roman"/>
+              </a:rPr>
+              <a:t>• Phase 4: FPGA Prototyping &amp; Final Defense Preparation (Weeks 7–8):</a:t>
+            </a:r>
+          </a:p>
+          <a:p>
+            <a:pPr>
+              <a:spcAft>
+                <a:spcPts val="200"/>
+              </a:spcAft>
+            </a:pPr>
+            <a:r>
+              <a:rPr sz="1100">
+                <a:solidFill>
+                  <a:srgbClr val="1F2937"/>
+                </a:solidFill>
+                <a:latin typeface="Calibri"/>
+              </a:rPr>
+              <a:t>– Design an on-chip UART/AXI interface to bridge host data once a physical FPGA board is procured in future revisions.</a:t>
+            </a:r>
+          </a:p>
+          <a:p>
+            <a:pPr>
+              <a:spcAft>
+                <a:spcPts val="1000"/>
+              </a:spcAft>
+            </a:pPr>
+            <a:r>
+              <a:rPr sz="1100">
+                <a:solidFill>
+                  <a:srgbClr val="1F2937"/>
+                </a:solidFill>
+                <a:latin typeface="Calibri"/>
+              </a:rPr>
+              <a:t>– Consolidate synthesis benchmarks, compile the final B.Tech project dissertation, and prepare the project defense presentation.</a:t>
             </a:r>
           </a:p>
         </p:txBody>
@@ -5755,7 +5543,7 @@
             <a:avLst/>
           </a:prstGeom>
           <a:solidFill>
-            <a:srgbClr val="9CA3AF"/>
+            <a:srgbClr val="A0A0A0"/>
           </a:solidFill>
           <a:ln>
             <a:noFill/>
@@ -5792,7 +5580,7 @@
         <p:spPr>
           <a:xfrm>
             <a:off x="365760" y="868680"/>
-            <a:ext cx="11460175" cy="621792"/>
+            <a:ext cx="11460175" cy="594360"/>
           </a:xfrm>
           <a:prstGeom prst="rect">
             <a:avLst/>
@@ -5827,7 +5615,7 @@
                 <a:solidFill>
                   <a:srgbClr val="FFFFFF"/>
                 </a:solidFill>
-                <a:latin typeface="Segoe UI"/>
+                <a:latin typeface="Times New Roman"/>
               </a:defRPr>
             </a:pPr>
             <a:r>
@@ -5861,9 +5649,9 @@
             <a:pPr>
               <a:defRPr sz="1000">
                 <a:solidFill>
-                  <a:srgbClr val="64748B"/>
-                </a:solidFill>
-                <a:latin typeface="Segoe UI"/>
+                  <a:srgbClr val="6B7280"/>
+                </a:solidFill>
+                <a:latin typeface="Times New Roman"/>
               </a:defRPr>
             </a:pPr>
             <a:r>
@@ -5897,9 +5685,9 @@
             <a:pPr algn="r">
               <a:defRPr sz="1000">
                 <a:solidFill>
-                  <a:srgbClr val="64748B"/>
-                </a:solidFill>
-                <a:latin typeface="Segoe UI"/>
+                  <a:srgbClr val="6B7280"/>
+                </a:solidFill>
+                <a:latin typeface="Times New Roman"/>
               </a:defRPr>
             </a:pPr>
             <a:r>
@@ -5910,74 +5698,39 @@
       </p:sp>
       <p:sp>
         <p:nvSpPr>
-          <p:cNvPr id="10" name="Rounded Rectangle 9"/>
-          <p:cNvSpPr/>
+          <p:cNvPr id="10" name="TextBox 9"/>
+          <p:cNvSpPr txBox="1"/>
           <p:nvPr/>
         </p:nvSpPr>
         <p:spPr>
           <a:xfrm>
             <a:off x="548640" y="1645920"/>
-            <a:ext cx="11094415" cy="4572000"/>
-          </a:xfrm>
-          <a:prstGeom prst="roundRect">
-            <a:avLst/>
-          </a:prstGeom>
-          <a:solidFill>
-            <a:srgbClr val="F8FAFC"/>
-          </a:solidFill>
-          <a:ln w="12700">
-            <a:solidFill>
-              <a:srgbClr val="E2E8F0"/>
-            </a:solidFill>
-          </a:ln>
-        </p:spPr>
-        <p:style>
-          <a:lnRef idx="1">
-            <a:schemeClr val="accent1"/>
-          </a:lnRef>
-          <a:fillRef idx="3">
-            <a:schemeClr val="accent1"/>
-          </a:fillRef>
-          <a:effectRef idx="2">
-            <a:schemeClr val="accent1"/>
-          </a:effectRef>
-          <a:fontRef idx="minor">
-            <a:schemeClr val="lt1"/>
-          </a:fontRef>
-        </p:style>
-        <p:txBody>
-          <a:bodyPr rtlCol="0" anchor="ctr" wrap="square" lIns="274320" rIns="274320" tIns="182880"/>
-          <a:lstStyle/>
-          <a:p>
-            <a:pPr algn="ctr">
-              <a:spcAft>
-                <a:spcPts val="800"/>
-              </a:spcAft>
-              <a:defRPr sz="1050">
-                <a:solidFill>
-                  <a:srgbClr val="1E293B"/>
-                </a:solidFill>
-                <a:latin typeface="Segoe UI"/>
-              </a:defRPr>
-            </a:pPr>
-            <a:r>
-              <a:t>[1] R. Kumar, V. B. Suresh, S. Taneja, M. A. Anders, S. Hsu, A. Agarwal, V. De, and S. K. Mathew, "A 7-Gbps SCA-Resistant Multiplicative-Masked AES Engine in Intel 4 CMOS," IEEE Journal of Solid-State Circuits, vol. 58, no. 4, pp. 1106–1116, Apr. 2023. [BASE PAPER]</a:t>
-            </a:r>
-          </a:p>
+            <a:ext cx="11094415" cy="4663440"/>
+          </a:xfrm>
+          <a:prstGeom prst="rect">
+            <a:avLst/>
+          </a:prstGeom>
+          <a:noFill/>
+        </p:spPr>
+        <p:txBody>
+          <a:bodyPr wrap="square">
+            <a:spAutoFit/>
+          </a:bodyPr>
+          <a:lstStyle/>
           <a:p>
             <a:pPr>
               <a:spcAft>
                 <a:spcPts val="800"/>
               </a:spcAft>
-              <a:defRPr sz="1050">
-                <a:solidFill>
-                  <a:srgbClr val="1E293B"/>
-                </a:solidFill>
-                <a:latin typeface="Segoe UI"/>
-              </a:defRPr>
-            </a:pPr>
-            <a:r>
-              <a:t>[2] National Institute of Standards and Technology (NIST), "Advanced Encryption Standard (AES)," Federal Information Processing Standards Publication FIPS PUB 197, Nov. 2001 (Updated 2023).</a:t>
+            </a:pPr>
+            <a:r>
+              <a:rPr sz="1050">
+                <a:solidFill>
+                  <a:srgbClr val="1F2937"/>
+                </a:solidFill>
+                <a:latin typeface="Times New Roman"/>
+              </a:rPr>
+              <a:t>[1] R. Kumar, V. B. Suresh, S. Taneja, M. A. Anders, S. Hsu, A. Agarwal, V. De, and S. K. Mathew, "A 7-Gbps SCA-Resistant Multiplicative-Masked AES Engine in Intel 4 CMOS," IEEE Journal of Solid-State Circuits, vol. 58, no. 4, pp. 1106–1116, Apr. 2023. [BASE PAPER]</a:t>
             </a:r>
           </a:p>
           <a:p>
@@ -5985,15 +5738,15 @@
               <a:spcAft>
                 <a:spcPts val="800"/>
               </a:spcAft>
-              <a:defRPr sz="1050">
-                <a:solidFill>
-                  <a:srgbClr val="1E293B"/>
-                </a:solidFill>
-                <a:latin typeface="Segoe UI"/>
-              </a:defRPr>
-            </a:pPr>
-            <a:r>
-              <a:t>[3] P. Kocher, J. Jaffe, and B. Jun, "Differential Power Analysis," in Advances in Cryptology — CRYPTO ’99, LNCS, vol. 1666, Springer, 1999, pp. 388–397.</a:t>
+            </a:pPr>
+            <a:r>
+              <a:rPr sz="1050">
+                <a:solidFill>
+                  <a:srgbClr val="1F2937"/>
+                </a:solidFill>
+                <a:latin typeface="Times New Roman"/>
+              </a:rPr>
+              <a:t>[2] National Institute of Standards and Technology (NIST), "Advanced Encryption Standard (AES)," Federal Information Processing Standards Publication FIPS PUB 197, Nov. 2001 (Updated 2023).</a:t>
             </a:r>
           </a:p>
           <a:p>
@@ -6001,15 +5754,15 @@
               <a:spcAft>
                 <a:spcPts val="800"/>
               </a:spcAft>
-              <a:defRPr sz="1050">
-                <a:solidFill>
-                  <a:srgbClr val="1E293B"/>
-                </a:solidFill>
-                <a:latin typeface="Segoe UI"/>
-              </a:defRPr>
-            </a:pPr>
-            <a:r>
-              <a:t>[4] S. Chari, C. S. Jutla, J. R. Rao, and P. Rohatgi, "Towards Sound Approaches to Counteract Power-Analysis Attacks," in Advances in Cryptology — CRYPTO ’99, LNCS, vol. 1666, Springer, 1999, pp. 398–412.</a:t>
+            </a:pPr>
+            <a:r>
+              <a:rPr sz="1050">
+                <a:solidFill>
+                  <a:srgbClr val="1F2937"/>
+                </a:solidFill>
+                <a:latin typeface="Times New Roman"/>
+              </a:rPr>
+              <a:t>[3] P. Kocher, J. Jaffe, and B. Jun, "Differential Power Analysis," in Advances in Cryptology — CRYPTO ’99, Lecture Notes in Computer Science, vol. 1666, Springer, Berlin, Heidelberg, pp. 388–397, 1999.</a:t>
             </a:r>
           </a:p>
           <a:p>
@@ -6017,15 +5770,15 @@
               <a:spcAft>
                 <a:spcPts val="800"/>
               </a:spcAft>
-              <a:defRPr sz="1050">
-                <a:solidFill>
-                  <a:srgbClr val="1E293B"/>
-                </a:solidFill>
-                <a:latin typeface="Segoe UI"/>
-              </a:defRPr>
-            </a:pPr>
-            <a:r>
-              <a:t>[5] D. Canright and L. Batina, "A Very Compact Perfectly Masked S-Box for AES," in Applied Cryptography and Network Security (ACNS 2008), LNCS, vol. 5037, Springer, 2008, pp. 446–459.</a:t>
+            </a:pPr>
+            <a:r>
+              <a:rPr sz="1050">
+                <a:solidFill>
+                  <a:srgbClr val="1F2937"/>
+                </a:solidFill>
+                <a:latin typeface="Times New Roman"/>
+              </a:rPr>
+              <a:t>[4] S. Chari, C. S. Jutla, J. R. Rao, and P. Rohatgi, "Towards Sound Approaches to Counteract Power-Analysis Attacks," in Advances in Cryptology — CRYPTO ’99, LNCS, vol. 1666, Springer, pp. 398–412, 1999.</a:t>
             </a:r>
           </a:p>
           <a:p>
@@ -6033,15 +5786,15 @@
               <a:spcAft>
                 <a:spcPts val="800"/>
               </a:spcAft>
-              <a:defRPr sz="1050">
-                <a:solidFill>
-                  <a:srgbClr val="1E293B"/>
-                </a:solidFill>
-                <a:latin typeface="Segoe UI"/>
-              </a:defRPr>
-            </a:pPr>
-            <a:r>
-              <a:t>[6] F. Regazzoni, Y. Wang, and F.-X. Standaert, "FPGA Implementations of Masked AES: A Comparative Evaluation," in CARDIS, Springer LNCS, 2011.</a:t>
+            </a:pPr>
+            <a:r>
+              <a:rPr sz="1050">
+                <a:solidFill>
+                  <a:srgbClr val="1F2937"/>
+                </a:solidFill>
+                <a:latin typeface="Times New Roman"/>
+              </a:rPr>
+              <a:t>[5] D. Canright and L. Batina, "A Very Compact Perfectly Masked S-Box for AES," in Applied Cryptography and Network Security (ACNS 2008), LNCS, vol. 5037, Springer, pp. 446–459, 2008.</a:t>
             </a:r>
           </a:p>
           <a:p>
@@ -6049,15 +5802,31 @@
               <a:spcAft>
                 <a:spcPts val="800"/>
               </a:spcAft>
-              <a:defRPr sz="1050">
-                <a:solidFill>
-                  <a:srgbClr val="1E293B"/>
-                </a:solidFill>
-                <a:latin typeface="Segoe UI"/>
-              </a:defRPr>
-            </a:pPr>
-            <a:r>
-              <a:t>[7] G. T. Becker, J. Cooper, E. DeMulder, G. Goodwill, J. Jaffe, et al., "Test Vector Leakage Assessment (TVLA) Methodology in Practice," in Proc. International Cryptographic Module Conference (ICMC), 2013.</a:t>
+            </a:pPr>
+            <a:r>
+              <a:rPr sz="1050">
+                <a:solidFill>
+                  <a:srgbClr val="1F2937"/>
+                </a:solidFill>
+                <a:latin typeface="Times New Roman"/>
+              </a:rPr>
+              <a:t>[6] F. Regazzoni, Y. Wang, and F.-X. Standaert, "FPGA Implementations of Masked AES: A Comparative Evaluation," in CARDIS, Springer LNCS, vol. 7079, pp. 248–264, 2011.</a:t>
+            </a:r>
+          </a:p>
+          <a:p>
+            <a:pPr>
+              <a:spcAft>
+                <a:spcPts val="800"/>
+              </a:spcAft>
+            </a:pPr>
+            <a:r>
+              <a:rPr sz="1050">
+                <a:solidFill>
+                  <a:srgbClr val="1F2937"/>
+                </a:solidFill>
+                <a:latin typeface="Times New Roman"/>
+              </a:rPr>
+              <a:t>[7] G. T. Becker, J. Cooper, E. DeMulder, G. Goodwill, J. Jaffe, et al., "Test Vector Leakage Assessment (TVLA) Methodology in Practice," in Proc. International Cryptographic Module Conference (ICMC), pp. 1–15, 2013.</a:t>
             </a:r>
           </a:p>
         </p:txBody>
@@ -6229,7 +5998,7 @@
             <a:avLst/>
           </a:prstGeom>
           <a:solidFill>
-            <a:srgbClr val="9CA3AF"/>
+            <a:srgbClr val="A0A0A0"/>
           </a:solidFill>
           <a:ln>
             <a:noFill/>
@@ -6282,9 +6051,9 @@
             <a:pPr>
               <a:defRPr sz="1000">
                 <a:solidFill>
-                  <a:srgbClr val="64748B"/>
-                </a:solidFill>
-                <a:latin typeface="Segoe UI"/>
+                  <a:srgbClr val="6B7280"/>
+                </a:solidFill>
+                <a:latin typeface="Times New Roman"/>
               </a:defRPr>
             </a:pPr>
             <a:r>
@@ -6318,9 +6087,9 @@
             <a:pPr algn="r">
               <a:defRPr sz="1000">
                 <a:solidFill>
-                  <a:srgbClr val="64748B"/>
-                </a:solidFill>
-                <a:latin typeface="Segoe UI"/>
+                  <a:srgbClr val="6B7280"/>
+                </a:solidFill>
+                <a:latin typeface="Times New Roman"/>
               </a:defRPr>
             </a:pPr>
             <a:r>
@@ -6337,8 +6106,8 @@
         </p:nvSpPr>
         <p:spPr>
           <a:xfrm>
-            <a:off x="914400" y="1828800"/>
-            <a:ext cx="10362895" cy="3200400"/>
+            <a:off x="914400" y="2011680"/>
+            <a:ext cx="10362895" cy="3474720"/>
           </a:xfrm>
           <a:prstGeom prst="rect">
             <a:avLst/>
@@ -6356,7 +6125,7 @@
                 <a:solidFill>
                   <a:srgbClr val="0F2557"/>
                 </a:solidFill>
-                <a:latin typeface="Segoe UI"/>
+                <a:latin typeface="Times New Roman"/>
               </a:defRPr>
             </a:pPr>
             <a:r>
@@ -6368,9 +6137,9 @@
             <a:pPr algn="ctr">
               <a:defRPr sz="2200" b="1">
                 <a:solidFill>
-                  <a:srgbClr val="2563EB"/>
-                </a:solidFill>
-                <a:latin typeface="Segoe UI"/>
+                  <a:srgbClr val="1D4ED8"/>
+                </a:solidFill>
+                <a:latin typeface="Times New Roman"/>
               </a:defRPr>
             </a:pPr>
             <a:r>
@@ -6381,9 +6150,9 @@
             <a:pPr algn="ctr">
               <a:defRPr sz="1600" i="1">
                 <a:solidFill>
-                  <a:srgbClr val="64748B"/>
-                </a:solidFill>
-                <a:latin typeface="Segoe UI"/>
+                  <a:srgbClr val="6B7280"/>
+                </a:solidFill>
+                <a:latin typeface="Calibri"/>
               </a:defRPr>
             </a:pPr>
             <a:r>
@@ -6397,7 +6166,7 @@
                 <a:solidFill>
                   <a:srgbClr val="0F2557"/>
                 </a:solidFill>
-                <a:latin typeface="Segoe UI"/>
+                <a:latin typeface="Times New Roman"/>
               </a:defRPr>
             </a:pPr>
             <a:r>
@@ -6405,7 +6174,7 @@
             </a:r>
             <a:br/>
             <a:r>
-              <a:t>Galgotias College of Engineering and Technology, Greater Noida (U.P.)</a:t>
+              <a:t>Galgotias College of Engineering and Technology, Gr. Noida(U.P.)</a:t>
             </a:r>
           </a:p>
         </p:txBody>
@@ -6577,7 +6346,7 @@
             <a:avLst/>
           </a:prstGeom>
           <a:solidFill>
-            <a:srgbClr val="9CA3AF"/>
+            <a:srgbClr val="A0A0A0"/>
           </a:solidFill>
           <a:ln>
             <a:noFill/>
@@ -6630,9 +6399,9 @@
             <a:pPr>
               <a:defRPr sz="1000">
                 <a:solidFill>
-                  <a:srgbClr val="64748B"/>
-                </a:solidFill>
-                <a:latin typeface="Segoe UI"/>
+                  <a:srgbClr val="6B7280"/>
+                </a:solidFill>
+                <a:latin typeface="Times New Roman"/>
               </a:defRPr>
             </a:pPr>
             <a:r>
@@ -6666,9 +6435,9 @@
             <a:pPr algn="r">
               <a:defRPr sz="1000">
                 <a:solidFill>
-                  <a:srgbClr val="64748B"/>
-                </a:solidFill>
-                <a:latin typeface="Segoe UI"/>
+                  <a:srgbClr val="6B7280"/>
+                </a:solidFill>
+                <a:latin typeface="Times New Roman"/>
               </a:defRPr>
             </a:pPr>
             <a:r>
@@ -6685,8 +6454,8 @@
         </p:nvSpPr>
         <p:spPr>
           <a:xfrm>
-            <a:off x="548640" y="731520"/>
-            <a:ext cx="10972800" cy="731520"/>
+            <a:off x="548640" y="777240"/>
+            <a:ext cx="11094415" cy="5486400"/>
           </a:xfrm>
           <a:prstGeom prst="rect">
             <a:avLst/>
@@ -6694,17 +6463,20 @@
           <a:noFill/>
         </p:spPr>
         <p:txBody>
-          <a:bodyPr wrap="none">
+          <a:bodyPr wrap="square">
             <a:spAutoFit/>
           </a:bodyPr>
           <a:lstStyle/>
           <a:p>
             <a:pPr>
+              <a:spcAft>
+                <a:spcPts val="1400"/>
+              </a:spcAft>
               <a:defRPr sz="1800" b="1">
                 <a:solidFill>
                   <a:srgbClr val="0F2557"/>
                 </a:solidFill>
-                <a:latin typeface="Segoe UI"/>
+                <a:latin typeface="Times New Roman"/>
               </a:defRPr>
             </a:pPr>
             <a:r>
@@ -6713,218 +6485,92 @@
           </a:p>
           <a:p>
             <a:pPr>
+              <a:spcAft>
+                <a:spcPts val="1800"/>
+              </a:spcAft>
               <a:defRPr sz="1600" b="1">
                 <a:solidFill>
-                  <a:srgbClr val="2563EB"/>
-                </a:solidFill>
-                <a:latin typeface="Segoe UI"/>
+                  <a:srgbClr val="0F2557"/>
+                </a:solidFill>
+                <a:latin typeface="Times New Roman"/>
               </a:defRPr>
             </a:pPr>
             <a:r>
               <a:t>SDG GOALS (2-3 only):</a:t>
             </a:r>
           </a:p>
-        </p:txBody>
-      </p:sp>
-      <p:sp>
-        <p:nvSpPr>
-          <p:cNvPr id="10" name="Rounded Rectangle 9"/>
-          <p:cNvSpPr/>
-          <p:nvPr/>
-        </p:nvSpPr>
-        <p:spPr>
-          <a:xfrm>
-            <a:off x="548640" y="1691640"/>
-            <a:ext cx="11094415" cy="1325880"/>
-          </a:xfrm>
-          <a:prstGeom prst="roundRect">
-            <a:avLst/>
-          </a:prstGeom>
-          <a:solidFill>
-            <a:srgbClr val="F8FAFC"/>
-          </a:solidFill>
-          <a:ln w="19050">
-            <a:solidFill>
-              <a:srgbClr val="2563EB"/>
-            </a:solidFill>
-          </a:ln>
-        </p:spPr>
-        <p:style>
-          <a:lnRef idx="1">
-            <a:schemeClr val="accent1"/>
-          </a:lnRef>
-          <a:fillRef idx="3">
-            <a:schemeClr val="accent1"/>
-          </a:fillRef>
-          <a:effectRef idx="2">
-            <a:schemeClr val="accent1"/>
-          </a:effectRef>
-          <a:fontRef idx="minor">
-            <a:schemeClr val="lt1"/>
-          </a:fontRef>
-        </p:style>
-        <p:txBody>
-          <a:bodyPr rtlCol="0" anchor="ctr" wrap="square" lIns="228600" tIns="137160"/>
-          <a:lstStyle/>
-          <a:p>
-            <a:pPr algn="ctr">
-              <a:defRPr sz="1400" b="1">
-                <a:solidFill>
-                  <a:srgbClr val="0F2557"/>
-                </a:solidFill>
-                <a:latin typeface="Segoe UI"/>
-              </a:defRPr>
-            </a:pPr>
-            <a:r>
-              <a:t>• SDG 9: Industry, Innovation &amp; Infrastructure (Target 9.5 &amp; 9.c)</a:t>
-            </a:r>
-          </a:p>
           <a:p>
             <a:pPr>
-              <a:defRPr sz="1200">
-                <a:solidFill>
-                  <a:srgbClr val="1E293B"/>
-                </a:solidFill>
-                <a:latin typeface="Segoe UI"/>
-              </a:defRPr>
-            </a:pPr>
-            <a:r>
-              <a:t>Fosters technological innovation and builds resilient digital infrastructure. Securing cryptographic hardware against side-channel power attacks protects smart grids, critical cyber-physical systems, and connected IoT infrastructure from physical eavesdropping and key extraction.</a:t>
-            </a:r>
-          </a:p>
-        </p:txBody>
-      </p:sp>
-      <p:sp>
-        <p:nvSpPr>
-          <p:cNvPr id="11" name="Rounded Rectangle 10"/>
-          <p:cNvSpPr/>
-          <p:nvPr/>
-        </p:nvSpPr>
-        <p:spPr>
-          <a:xfrm>
-            <a:off x="548640" y="3200400"/>
-            <a:ext cx="11094415" cy="1325880"/>
-          </a:xfrm>
-          <a:prstGeom prst="roundRect">
-            <a:avLst/>
-          </a:prstGeom>
-          <a:solidFill>
-            <a:srgbClr val="F8FAFC"/>
-          </a:solidFill>
-          <a:ln w="19050">
-            <a:solidFill>
-              <a:srgbClr val="2563EB"/>
-            </a:solidFill>
-          </a:ln>
-        </p:spPr>
-        <p:style>
-          <a:lnRef idx="1">
-            <a:schemeClr val="accent1"/>
-          </a:lnRef>
-          <a:fillRef idx="3">
-            <a:schemeClr val="accent1"/>
-          </a:fillRef>
-          <a:effectRef idx="2">
-            <a:schemeClr val="accent1"/>
-          </a:effectRef>
-          <a:fontRef idx="minor">
-            <a:schemeClr val="lt1"/>
-          </a:fontRef>
-        </p:style>
-        <p:txBody>
-          <a:bodyPr rtlCol="0" anchor="ctr" wrap="square" lIns="228600" tIns="137160"/>
-          <a:lstStyle/>
-          <a:p>
-            <a:pPr algn="ctr">
-              <a:defRPr sz="1400" b="1">
-                <a:solidFill>
-                  <a:srgbClr val="0F2557"/>
-                </a:solidFill>
-                <a:latin typeface="Segoe UI"/>
-              </a:defRPr>
-            </a:pPr>
-            <a:r>
-              <a:t>• SDG 16: Peace, Justice &amp; Strong Institutions (Target 16.10)</a:t>
+              <a:spcAft>
+                <a:spcPts val="1600"/>
+              </a:spcAft>
+            </a:pPr>
+            <a:r>
+              <a:rPr sz="1300" b="1">
+                <a:solidFill>
+                  <a:srgbClr val="1D4ED8"/>
+                </a:solidFill>
+                <a:latin typeface="Times New Roman"/>
+              </a:rPr>
+              <a:t>• SDG 9: Industry, Innovation and Infrastructure: Target 9.5 &amp; 9.c: </a:t>
+            </a:r>
+            <a:r>
+              <a:rPr sz="1250">
+                <a:solidFill>
+                  <a:srgbClr val="1F2937"/>
+                </a:solidFill>
+                <a:latin typeface="Calibri"/>
+              </a:rPr>
+              <a:t>Fosters technological innovation and builds resilient digital infrastructure. Securing cryptographic hardware against side-channel attacks protects smart grids, critical cyber-physical systems, and IoT infrastructure from physical tampering and eavesdropping.</a:t>
             </a:r>
           </a:p>
           <a:p>
             <a:pPr>
-              <a:defRPr sz="1200">
-                <a:solidFill>
-                  <a:srgbClr val="1E293B"/>
-                </a:solidFill>
-                <a:latin typeface="Segoe UI"/>
-              </a:defRPr>
-            </a:pPr>
-            <a:r>
-              <a:t>Safeguards data privacy, institutional cybersecurity, and public trust. Prevents physical secret-key extraction from embedded cryptographic modules, securing sensitive governmental, financial, and industrial communication channels.</a:t>
-            </a:r>
-          </a:p>
-        </p:txBody>
-      </p:sp>
-      <p:sp>
-        <p:nvSpPr>
-          <p:cNvPr id="12" name="Rounded Rectangle 11"/>
-          <p:cNvSpPr/>
-          <p:nvPr/>
-        </p:nvSpPr>
-        <p:spPr>
-          <a:xfrm>
-            <a:off x="548640" y="4709160"/>
-            <a:ext cx="11094415" cy="1325880"/>
-          </a:xfrm>
-          <a:prstGeom prst="roundRect">
-            <a:avLst/>
-          </a:prstGeom>
-          <a:solidFill>
-            <a:srgbClr val="F8FAFC"/>
-          </a:solidFill>
-          <a:ln w="19050">
-            <a:solidFill>
-              <a:srgbClr val="2563EB"/>
-            </a:solidFill>
-          </a:ln>
-        </p:spPr>
-        <p:style>
-          <a:lnRef idx="1">
-            <a:schemeClr val="accent1"/>
-          </a:lnRef>
-          <a:fillRef idx="3">
-            <a:schemeClr val="accent1"/>
-          </a:fillRef>
-          <a:effectRef idx="2">
-            <a:schemeClr val="accent1"/>
-          </a:effectRef>
-          <a:fontRef idx="minor">
-            <a:schemeClr val="lt1"/>
-          </a:fontRef>
-        </p:style>
-        <p:txBody>
-          <a:bodyPr rtlCol="0" anchor="ctr" wrap="square" lIns="228600" tIns="137160"/>
-          <a:lstStyle/>
-          <a:p>
-            <a:pPr algn="ctr">
-              <a:defRPr sz="1400" b="1">
-                <a:solidFill>
-                  <a:srgbClr val="0F2557"/>
-                </a:solidFill>
-                <a:latin typeface="Segoe UI"/>
-              </a:defRPr>
-            </a:pPr>
-            <a:r>
-              <a:t>• SDG 12: Responsible Consumption &amp; Production (Target 12.2 &amp; 12.a)</a:t>
+              <a:spcAft>
+                <a:spcPts val="1600"/>
+              </a:spcAft>
+            </a:pPr>
+            <a:r>
+              <a:rPr sz="1300" b="1">
+                <a:solidFill>
+                  <a:srgbClr val="1D4ED8"/>
+                </a:solidFill>
+                <a:latin typeface="Times New Roman"/>
+              </a:rPr>
+              <a:t>• SDG 16: Peace, Justice and Strong Institutions: Target 16.10: </a:t>
+            </a:r>
+            <a:r>
+              <a:rPr sz="1250">
+                <a:solidFill>
+                  <a:srgbClr val="1F2937"/>
+                </a:solidFill>
+                <a:latin typeface="Calibri"/>
+              </a:rPr>
+              <a:t>Safeguards data privacy, institutional cybersecurity, and public trust. Prevents physical secret-key extraction from embedded cryptographic modules, securing sensitive governmental, industrial, and financial communication channels.</a:t>
             </a:r>
           </a:p>
           <a:p>
             <a:pPr>
-              <a:defRPr sz="1200">
-                <a:solidFill>
-                  <a:srgbClr val="1E293B"/>
-                </a:solidFill>
-                <a:latin typeface="Segoe UI"/>
-              </a:defRPr>
-            </a:pPr>
-            <a:r>
+              <a:spcAft>
+                <a:spcPts val="1600"/>
+              </a:spcAft>
+            </a:pPr>
+            <a:r>
+              <a:rPr sz="1300" b="1">
+                <a:solidFill>
+                  <a:srgbClr val="1D4ED8"/>
+                </a:solidFill>
+                <a:latin typeface="Times New Roman"/>
+              </a:rPr>
+              <a:t>• SDG 12: Responsible Consumption and Production (Secondary): Target 12.2 &amp; 12.a: </a:t>
+            </a:r>
+            <a:r>
+              <a:rPr sz="1250">
+                <a:solidFill>
+                  <a:srgbClr val="1F2937"/>
+                </a:solidFill>
+                <a:latin typeface="Calibri"/>
+              </a:rPr>
               <a:t>Promotes silicon resource efficiency by optimizing the trade-off between side-channel security countermeasures and hardware overhead (minimizing LUT/FF area inflation and power dissipation).</a:t>
             </a:r>
           </a:p>
@@ -7097,7 +6743,7 @@
             <a:avLst/>
           </a:prstGeom>
           <a:solidFill>
-            <a:srgbClr val="9CA3AF"/>
+            <a:srgbClr val="A0A0A0"/>
           </a:solidFill>
           <a:ln>
             <a:noFill/>
@@ -7150,9 +6796,9 @@
             <a:pPr>
               <a:defRPr sz="1000">
                 <a:solidFill>
-                  <a:srgbClr val="64748B"/>
-                </a:solidFill>
-                <a:latin typeface="Segoe UI"/>
+                  <a:srgbClr val="6B7280"/>
+                </a:solidFill>
+                <a:latin typeface="Times New Roman"/>
               </a:defRPr>
             </a:pPr>
             <a:r>
@@ -7186,9 +6832,9 @@
             <a:pPr algn="r">
               <a:defRPr sz="1000">
                 <a:solidFill>
-                  <a:srgbClr val="64748B"/>
-                </a:solidFill>
-                <a:latin typeface="Segoe UI"/>
+                  <a:srgbClr val="6B7280"/>
+                </a:solidFill>
+                <a:latin typeface="Times New Roman"/>
               </a:defRPr>
             </a:pPr>
             <a:r>
@@ -7205,8 +6851,8 @@
         </p:nvSpPr>
         <p:spPr>
           <a:xfrm>
-            <a:off x="548640" y="640080"/>
-            <a:ext cx="10972800" cy="548640"/>
+            <a:off x="548640" y="777240"/>
+            <a:ext cx="11094415" cy="5486400"/>
           </a:xfrm>
           <a:prstGeom prst="rect">
             <a:avLst/>
@@ -7214,266 +6860,182 @@
           <a:noFill/>
         </p:spPr>
         <p:txBody>
-          <a:bodyPr wrap="none">
+          <a:bodyPr wrap="square">
             <a:spAutoFit/>
           </a:bodyPr>
           <a:lstStyle/>
           <a:p>
             <a:pPr>
-              <a:defRPr sz="1700" b="1">
+              <a:spcAft>
+                <a:spcPts val="1200"/>
+              </a:spcAft>
+              <a:defRPr sz="1800" b="1">
                 <a:solidFill>
                   <a:srgbClr val="0F2557"/>
                 </a:solidFill>
-                <a:latin typeface="Segoe UI"/>
+                <a:latin typeface="Times New Roman"/>
               </a:defRPr>
             </a:pPr>
             <a:r>
               <a:t>TITLE: Secure AES-128 Implementation with Side-Channel Attack Resistance</a:t>
             </a:r>
           </a:p>
-        </p:txBody>
-      </p:sp>
-      <p:sp>
-        <p:nvSpPr>
-          <p:cNvPr id="10" name="Rounded Rectangle 9"/>
-          <p:cNvSpPr/>
-          <p:nvPr/>
-        </p:nvSpPr>
-        <p:spPr>
-          <a:xfrm>
-            <a:off x="548640" y="1280160"/>
-            <a:ext cx="5394960" cy="4937760"/>
-          </a:xfrm>
-          <a:prstGeom prst="roundRect">
-            <a:avLst/>
-          </a:prstGeom>
-          <a:solidFill>
-            <a:srgbClr val="F8FAFC"/>
-          </a:solidFill>
-          <a:ln w="19050">
-            <a:solidFill>
-              <a:srgbClr val="0F2557"/>
-            </a:solidFill>
-          </a:ln>
-        </p:spPr>
-        <p:style>
-          <a:lnRef idx="1">
-            <a:schemeClr val="accent1"/>
-          </a:lnRef>
-          <a:fillRef idx="3">
-            <a:schemeClr val="accent1"/>
-          </a:fillRef>
-          <a:effectRef idx="2">
-            <a:schemeClr val="accent1"/>
-          </a:effectRef>
-          <a:fontRef idx="minor">
-            <a:schemeClr val="lt1"/>
-          </a:fontRef>
-        </p:style>
-        <p:txBody>
-          <a:bodyPr rtlCol="0" anchor="ctr" wrap="square" lIns="182880" rIns="182880" tIns="182880"/>
-          <a:lstStyle/>
-          <a:p>
-            <a:pPr algn="ctr">
-              <a:defRPr sz="1300" b="1">
+          <a:p>
+            <a:pPr>
+              <a:spcAft>
+                <a:spcPts val="800"/>
+              </a:spcAft>
+              <a:defRPr sz="1500" b="1">
                 <a:solidFill>
                   <a:srgbClr val="0F2557"/>
                 </a:solidFill>
-                <a:latin typeface="Segoe UI"/>
+                <a:latin typeface="Times New Roman"/>
               </a:defRPr>
             </a:pPr>
             <a:r>
-              <a:t>PROGRAM OUTCOMES (POs) MAPPED (2-3 only):</a:t>
+              <a:t>PROGRAM OUTCOMES (POs) MAPPED:</a:t>
+            </a:r>
+          </a:p>
+          <a:p>
+            <a:pPr>
+              <a:spcAft>
+                <a:spcPts val="800"/>
+              </a:spcAft>
+            </a:pPr>
+            <a:r>
+              <a:rPr sz="1250" b="1">
+                <a:solidFill>
+                  <a:srgbClr val="1D4ED8"/>
+                </a:solidFill>
+                <a:latin typeface="Times New Roman"/>
+              </a:rPr>
+              <a:t>• PO1 (Engineering Knowledge): </a:t>
+            </a:r>
+            <a:r>
+              <a:rPr sz="1200">
+                <a:solidFill>
+                  <a:srgbClr val="1F2937"/>
+                </a:solidFill>
+                <a:latin typeface="Calibri"/>
+              </a:rPr>
+              <a:t>Applied Galois field GF(2^8) arithmetic, cryptography, and digital VLSI design principles to model the AES-128 core.</a:t>
+            </a:r>
+          </a:p>
+          <a:p>
+            <a:pPr>
+              <a:spcAft>
+                <a:spcPts val="800"/>
+              </a:spcAft>
+            </a:pPr>
+            <a:r>
+              <a:rPr sz="1250" b="1">
+                <a:solidFill>
+                  <a:srgbClr val="1D4ED8"/>
+                </a:solidFill>
+                <a:latin typeface="Times New Roman"/>
+              </a:rPr>
+              <a:t>• PO3 (Design/Development): </a:t>
+            </a:r>
+            <a:r>
+              <a:rPr sz="1200">
+                <a:solidFill>
+                  <a:srgbClr val="1F2937"/>
+                </a:solidFill>
+                <a:latin typeface="Calibri"/>
+              </a:rPr>
+              <a:t>Engineered a first-order masked AES datapath with a protected S-box and mask-refreshing logic balancing security and area overhead.</a:t>
+            </a:r>
+          </a:p>
+          <a:p>
+            <a:pPr>
+              <a:spcAft>
+                <a:spcPts val="800"/>
+              </a:spcAft>
+            </a:pPr>
+            <a:r>
+              <a:rPr sz="1250" b="1">
+                <a:solidFill>
+                  <a:srgbClr val="1D4ED8"/>
+                </a:solidFill>
+                <a:latin typeface="Times New Roman"/>
+              </a:rPr>
+              <a:t>• PO5 (Modern Tool Usage): </a:t>
+            </a:r>
+            <a:r>
+              <a:rPr sz="1200">
+                <a:solidFill>
+                  <a:srgbClr val="1F2937"/>
+                </a:solidFill>
+                <a:latin typeface="Calibri"/>
+              </a:rPr>
+              <a:t>Employed industry-standard EDA tools (AMD-Xilinx Vivado, Verilog HDL) for RTL modeling, simulation, and synthesis.</a:t>
             </a:r>
           </a:p>
           <a:p>
             <a:br/>
             <a:pPr>
-              <a:defRPr sz="1200" b="1">
-                <a:solidFill>
-                  <a:srgbClr val="2563EB"/>
-                </a:solidFill>
-                <a:latin typeface="Segoe UI"/>
+              <a:spcAft>
+                <a:spcPts val="800"/>
+              </a:spcAft>
+              <a:defRPr sz="1500" b="1">
+                <a:solidFill>
+                  <a:srgbClr val="0F2557"/>
+                </a:solidFill>
+                <a:latin typeface="Times New Roman"/>
               </a:defRPr>
             </a:pPr>
             <a:r>
-              <a:t>• PO1 (Engineering Knowledge):</a:t>
+              <a:t>PROGRAM SPECIFIC OUTCOMES (PSOs) MAPPED:</a:t>
             </a:r>
           </a:p>
           <a:p>
             <a:pPr>
-              <a:defRPr sz="1100">
-                <a:solidFill>
-                  <a:srgbClr val="1E293B"/>
-                </a:solidFill>
-                <a:latin typeface="Segoe UI"/>
-              </a:defRPr>
-            </a:pPr>
-            <a:r>
-              <a:t>Applied Galois Field GF(2^8) composite field arithmetic, symmetric cryptography, and digital VLSI design principles to architect the 128-bit AES core.</a:t>
-            </a:r>
-          </a:p>
-          <a:p>
-            <a:br/>
+              <a:spcAft>
+                <a:spcPts val="800"/>
+              </a:spcAft>
+            </a:pPr>
+            <a:r>
+              <a:rPr sz="1250" b="1">
+                <a:solidFill>
+                  <a:srgbClr val="1D4ED8"/>
+                </a:solidFill>
+                <a:latin typeface="Times New Roman"/>
+              </a:rPr>
+              <a:t>• PSO1 (VLSI System Design): </a:t>
+            </a:r>
+            <a:r>
+              <a:rPr sz="1200">
+                <a:solidFill>
+                  <a:srgbClr val="1F2937"/>
+                </a:solidFill>
+                <a:latin typeface="Calibri"/>
+              </a:rPr>
+              <a:t>Ability to design and simulate complex hardware cryptographic subsystems using synthesizable Verilog HDL.</a:t>
+            </a:r>
+          </a:p>
+          <a:p>
             <a:pPr>
-              <a:defRPr sz="1200" b="1">
-                <a:solidFill>
-                  <a:srgbClr val="2563EB"/>
-                </a:solidFill>
-                <a:latin typeface="Segoe UI"/>
-              </a:defRPr>
-            </a:pPr>
-            <a:r>
-              <a:t>• PO3 (Design/Development):</a:t>
-            </a:r>
-          </a:p>
-          <a:p>
-            <a:pPr>
-              <a:defRPr sz="1100">
-                <a:solidFill>
-                  <a:srgbClr val="1E293B"/>
-                </a:solidFill>
-                <a:latin typeface="Segoe UI"/>
-              </a:defRPr>
-            </a:pPr>
-            <a:r>
-              <a:t>Engineered a first-order Boolean masked datapath (X' = X ⊕ M) with a glitch-resistant composite-field S-box and dynamic PRNG mask refresh balancing security and area overhead.</a:t>
-            </a:r>
-          </a:p>
-          <a:p>
-            <a:br/>
-            <a:pPr>
-              <a:defRPr sz="1200" b="1">
-                <a:solidFill>
-                  <a:srgbClr val="2563EB"/>
-                </a:solidFill>
-                <a:latin typeface="Segoe UI"/>
-              </a:defRPr>
-            </a:pPr>
-            <a:r>
-              <a:t>• PO5 (Modern Tool Usage):</a:t>
-            </a:r>
-          </a:p>
-          <a:p>
-            <a:pPr>
-              <a:defRPr sz="1100">
-                <a:solidFill>
-                  <a:srgbClr val="1E293B"/>
-                </a:solidFill>
-                <a:latin typeface="Segoe UI"/>
-              </a:defRPr>
-            </a:pPr>
-            <a:r>
-              <a:t>Employed industry-standard EDA tools (AMD-Xilinx Vivado ML v2025.2, Verilog HDL) for RTL modeling, simulation, and logic synthesis.</a:t>
-            </a:r>
-          </a:p>
-        </p:txBody>
-      </p:sp>
-      <p:sp>
-        <p:nvSpPr>
-          <p:cNvPr id="11" name="Rounded Rectangle 10"/>
-          <p:cNvSpPr/>
-          <p:nvPr/>
-        </p:nvSpPr>
-        <p:spPr>
-          <a:xfrm>
-            <a:off x="6217920" y="1280160"/>
-            <a:ext cx="5394960" cy="4937760"/>
-          </a:xfrm>
-          <a:prstGeom prst="roundRect">
-            <a:avLst/>
-          </a:prstGeom>
-          <a:solidFill>
-            <a:srgbClr val="F8FAFC"/>
-          </a:solidFill>
-          <a:ln w="19050">
-            <a:solidFill>
-              <a:srgbClr val="0F2557"/>
-            </a:solidFill>
-          </a:ln>
-        </p:spPr>
-        <p:style>
-          <a:lnRef idx="1">
-            <a:schemeClr val="accent1"/>
-          </a:lnRef>
-          <a:fillRef idx="3">
-            <a:schemeClr val="accent1"/>
-          </a:fillRef>
-          <a:effectRef idx="2">
-            <a:schemeClr val="accent1"/>
-          </a:effectRef>
-          <a:fontRef idx="minor">
-            <a:schemeClr val="lt1"/>
-          </a:fontRef>
-        </p:style>
-        <p:txBody>
-          <a:bodyPr rtlCol="0" anchor="ctr" wrap="square" lIns="182880" rIns="182880" tIns="182880"/>
-          <a:lstStyle/>
-          <a:p>
-            <a:pPr algn="ctr">
-              <a:defRPr sz="1300" b="1">
-                <a:solidFill>
-                  <a:srgbClr val="0F2557"/>
-                </a:solidFill>
-                <a:latin typeface="Segoe UI"/>
-              </a:defRPr>
-            </a:pPr>
-            <a:r>
-              <a:t>PROGRAM SPECIFIC OUTCOMES (PSOs) MAPPED:</a:t>
-            </a:r>
-          </a:p>
-          <a:p>
-            <a:br/>
-            <a:pPr>
-              <a:defRPr sz="1200" b="1">
-                <a:solidFill>
-                  <a:srgbClr val="2563EB"/>
-                </a:solidFill>
-                <a:latin typeface="Segoe UI"/>
-              </a:defRPr>
-            </a:pPr>
-            <a:r>
-              <a:t>• PSO1 (VLSI System Design):</a:t>
-            </a:r>
-          </a:p>
-          <a:p>
-            <a:pPr>
-              <a:defRPr sz="1100">
-                <a:solidFill>
-                  <a:srgbClr val="1E293B"/>
-                </a:solidFill>
-                <a:latin typeface="Segoe UI"/>
-              </a:defRPr>
-            </a:pPr>
-            <a:r>
-              <a:t>Demonstrated the capability to architect, model, and simulate secure hardware cryptographic subsystems using synthesizable Verilog HDL descriptions across modular datapath pipelines.</a:t>
-            </a:r>
-          </a:p>
-          <a:p>
-            <a:br/>
-            <a:pPr>
-              <a:defRPr sz="1200" b="1">
-                <a:solidFill>
-                  <a:srgbClr val="2563EB"/>
-                </a:solidFill>
-                <a:latin typeface="Segoe UI"/>
-              </a:defRPr>
-            </a:pPr>
-            <a:r>
-              <a:t>• PSO2 (EDA Tools &amp; Verification):</a:t>
-            </a:r>
-          </a:p>
-          <a:p>
-            <a:pPr>
-              <a:defRPr sz="1100">
-                <a:solidFill>
-                  <a:srgbClr val="1E293B"/>
-                </a:solidFill>
-                <a:latin typeface="Segoe UI"/>
-              </a:defRPr>
-            </a:pPr>
-            <a:r>
-              <a:t>Achieved proficiency in industry-grade FPGA synthesis, Static Timing Analysis (STA), clock constraint modeling, and hardware resource benchmarking targeting commercial AMD-Xilinx 7-series silicon.</a:t>
+              <a:spcAft>
+                <a:spcPts val="800"/>
+              </a:spcAft>
+            </a:pPr>
+            <a:r>
+              <a:rPr sz="1250" b="1">
+                <a:solidFill>
+                  <a:srgbClr val="1D4ED8"/>
+                </a:solidFill>
+                <a:latin typeface="Times New Roman"/>
+              </a:rPr>
+              <a:t>• PSO2 (EDA Tools &amp; Verification): </a:t>
+            </a:r>
+            <a:r>
+              <a:rPr sz="1200">
+                <a:solidFill>
+                  <a:srgbClr val="1F2937"/>
+                </a:solidFill>
+                <a:latin typeface="Calibri"/>
+              </a:rPr>
+              <a:t>Proficiency in FPGA synthesis, static timing closure, and hardware benchmarking.</a:t>
             </a:r>
           </a:p>
         </p:txBody>
@@ -7645,7 +7207,7 @@
             <a:avLst/>
           </a:prstGeom>
           <a:solidFill>
-            <a:srgbClr val="9CA3AF"/>
+            <a:srgbClr val="A0A0A0"/>
           </a:solidFill>
           <a:ln>
             <a:noFill/>
@@ -7675,60 +7237,7 @@
       </p:sp>
       <p:sp>
         <p:nvSpPr>
-          <p:cNvPr id="7" name="Rectangle 6"/>
-          <p:cNvSpPr/>
-          <p:nvPr/>
-        </p:nvSpPr>
-        <p:spPr>
-          <a:xfrm>
-            <a:off x="365760" y="868680"/>
-            <a:ext cx="11460175" cy="621792"/>
-          </a:xfrm>
-          <a:prstGeom prst="rect">
-            <a:avLst/>
-          </a:prstGeom>
-          <a:solidFill>
-            <a:srgbClr val="0F2557"/>
-          </a:solidFill>
-          <a:ln>
-            <a:noFill/>
-          </a:ln>
-        </p:spPr>
-        <p:style>
-          <a:lnRef idx="1">
-            <a:schemeClr val="accent1"/>
-          </a:lnRef>
-          <a:fillRef idx="3">
-            <a:schemeClr val="accent1"/>
-          </a:fillRef>
-          <a:effectRef idx="2">
-            <a:schemeClr val="accent1"/>
-          </a:effectRef>
-          <a:fontRef idx="minor">
-            <a:schemeClr val="lt1"/>
-          </a:fontRef>
-        </p:style>
-        <p:txBody>
-          <a:bodyPr rtlCol="0" anchor="ctr" wrap="square" lIns="228600"/>
-          <a:lstStyle/>
-          <a:p>
-            <a:pPr algn="l">
-              <a:defRPr sz="2000" b="1">
-                <a:solidFill>
-                  <a:srgbClr val="FFFFFF"/>
-                </a:solidFill>
-                <a:latin typeface="Segoe UI"/>
-              </a:defRPr>
-            </a:pPr>
-            <a:r>
-              <a:t>TABLE OF CONTENTS</a:t>
-            </a:r>
-          </a:p>
-        </p:txBody>
-      </p:sp>
-      <p:sp>
-        <p:nvSpPr>
-          <p:cNvPr id="8" name="TextBox 7"/>
+          <p:cNvPr id="7" name="TextBox 6"/>
           <p:cNvSpPr txBox="1"/>
           <p:nvPr/>
         </p:nvSpPr>
@@ -7751,9 +7260,9 @@
             <a:pPr>
               <a:defRPr sz="1000">
                 <a:solidFill>
-                  <a:srgbClr val="64748B"/>
-                </a:solidFill>
-                <a:latin typeface="Segoe UI"/>
+                  <a:srgbClr val="6B7280"/>
+                </a:solidFill>
+                <a:latin typeface="Times New Roman"/>
               </a:defRPr>
             </a:pPr>
             <a:r>
@@ -7764,7 +7273,7 @@
       </p:sp>
       <p:sp>
         <p:nvSpPr>
-          <p:cNvPr id="9" name="TextBox 8"/>
+          <p:cNvPr id="8" name="TextBox 7"/>
           <p:cNvSpPr txBox="1"/>
           <p:nvPr/>
         </p:nvSpPr>
@@ -7787,9 +7296,9 @@
             <a:pPr algn="r">
               <a:defRPr sz="1000">
                 <a:solidFill>
-                  <a:srgbClr val="64748B"/>
-                </a:solidFill>
-                <a:latin typeface="Segoe UI"/>
+                  <a:srgbClr val="6B7280"/>
+                </a:solidFill>
+                <a:latin typeface="Times New Roman"/>
               </a:defRPr>
             </a:pPr>
             <a:r>
@@ -7800,544 +7309,298 @@
       </p:sp>
       <p:sp>
         <p:nvSpPr>
-          <p:cNvPr id="10" name="Rounded Rectangle 9"/>
-          <p:cNvSpPr/>
-          <p:nvPr/>
-        </p:nvSpPr>
-        <p:spPr>
-          <a:xfrm>
-            <a:off x="548640" y="1691640"/>
-            <a:ext cx="5394960" cy="1005840"/>
-          </a:xfrm>
-          <a:prstGeom prst="roundRect">
-            <a:avLst/>
-          </a:prstGeom>
-          <a:solidFill>
-            <a:srgbClr val="F8FAFC"/>
-          </a:solidFill>
-          <a:ln w="12700">
-            <a:solidFill>
-              <a:srgbClr val="E2E8F0"/>
-            </a:solidFill>
-          </a:ln>
-        </p:spPr>
-        <p:style>
-          <a:lnRef idx="1">
-            <a:schemeClr val="accent1"/>
-          </a:lnRef>
-          <a:fillRef idx="3">
-            <a:schemeClr val="accent1"/>
-          </a:fillRef>
-          <a:effectRef idx="2">
-            <a:schemeClr val="accent1"/>
-          </a:effectRef>
-          <a:fontRef idx="minor">
-            <a:schemeClr val="lt1"/>
-          </a:fontRef>
-        </p:style>
-        <p:txBody>
-          <a:bodyPr rtlCol="0" anchor="ctr" wrap="square" lIns="137160" tIns="91440"/>
+          <p:cNvPr id="9" name="TextBox 8"/>
+          <p:cNvSpPr txBox="1"/>
+          <p:nvPr/>
+        </p:nvSpPr>
+        <p:spPr>
+          <a:xfrm>
+            <a:off x="548640" y="868680"/>
+            <a:ext cx="11094415" cy="548640"/>
+          </a:xfrm>
+          <a:prstGeom prst="rect">
+            <a:avLst/>
+          </a:prstGeom>
+          <a:noFill/>
+        </p:spPr>
+        <p:txBody>
+          <a:bodyPr wrap="none">
+            <a:spAutoFit/>
+          </a:bodyPr>
           <a:lstStyle/>
           <a:p>
             <a:pPr algn="ctr">
-              <a:defRPr sz="1300" b="1">
+              <a:defRPr sz="2400" b="1">
                 <a:solidFill>
                   <a:srgbClr val="0F2557"/>
                 </a:solidFill>
-                <a:latin typeface="Segoe UI"/>
+                <a:latin typeface="Times New Roman"/>
               </a:defRPr>
             </a:pPr>
             <a:r>
+              <a:t>TABLE OF CONTENTS</a:t>
+            </a:r>
+          </a:p>
+        </p:txBody>
+      </p:sp>
+      <p:sp>
+        <p:nvSpPr>
+          <p:cNvPr id="10" name="TextBox 9"/>
+          <p:cNvSpPr txBox="1"/>
+          <p:nvPr/>
+        </p:nvSpPr>
+        <p:spPr>
+          <a:xfrm>
+            <a:off x="1097280" y="1691640"/>
+            <a:ext cx="4937760" cy="4389120"/>
+          </a:xfrm>
+          <a:prstGeom prst="rect">
+            <a:avLst/>
+          </a:prstGeom>
+          <a:noFill/>
+        </p:spPr>
+        <p:txBody>
+          <a:bodyPr wrap="square">
+            <a:spAutoFit/>
+          </a:bodyPr>
+          <a:lstStyle/>
+          <a:p>
+            <a:r>
+              <a:rPr sz="1500" b="1">
+                <a:solidFill>
+                  <a:srgbClr val="0F2557"/>
+                </a:solidFill>
+                <a:latin typeface="Times New Roman"/>
+              </a:rPr>
               <a:t>1. Introduction</a:t>
             </a:r>
           </a:p>
           <a:p>
             <a:pPr>
-              <a:defRPr sz="1000">
-                <a:solidFill>
-                  <a:srgbClr val="64748B"/>
-                </a:solidFill>
-                <a:latin typeface="Segoe UI"/>
-              </a:defRPr>
-            </a:pPr>
-            <a:r>
-              <a:t>Cryptographic background, side-channel power leakage &amp; Boolean masking countermeasure.</a:t>
-            </a:r>
-          </a:p>
-        </p:txBody>
-      </p:sp>
-      <p:sp>
-        <p:nvSpPr>
-          <p:cNvPr id="11" name="Rounded Rectangle 10"/>
-          <p:cNvSpPr/>
-          <p:nvPr/>
-        </p:nvSpPr>
-        <p:spPr>
-          <a:xfrm>
-            <a:off x="548640" y="2834640"/>
-            <a:ext cx="5394960" cy="1005840"/>
-          </a:xfrm>
-          <a:prstGeom prst="roundRect">
-            <a:avLst/>
-          </a:prstGeom>
-          <a:solidFill>
-            <a:srgbClr val="F8FAFC"/>
-          </a:solidFill>
-          <a:ln w="12700">
-            <a:solidFill>
-              <a:srgbClr val="E2E8F0"/>
-            </a:solidFill>
-          </a:ln>
-        </p:spPr>
-        <p:style>
-          <a:lnRef idx="1">
-            <a:schemeClr val="accent1"/>
-          </a:lnRef>
-          <a:fillRef idx="3">
-            <a:schemeClr val="accent1"/>
-          </a:fillRef>
-          <a:effectRef idx="2">
-            <a:schemeClr val="accent1"/>
-          </a:effectRef>
-          <a:fontRef idx="minor">
-            <a:schemeClr val="lt1"/>
-          </a:fontRef>
-        </p:style>
-        <p:txBody>
-          <a:bodyPr rtlCol="0" anchor="ctr" wrap="square" lIns="137160" tIns="91440"/>
-          <a:lstStyle/>
-          <a:p>
-            <a:pPr algn="ctr">
-              <a:defRPr sz="1300" b="1">
+              <a:spcAft>
+                <a:spcPts val="1800"/>
+              </a:spcAft>
+            </a:pPr>
+            <a:r>
+              <a:rPr sz="1150">
+                <a:solidFill>
+                  <a:srgbClr val="6B7280"/>
+                </a:solidFill>
+                <a:latin typeface="Calibri"/>
+              </a:rPr>
+              <a:t>Cryptographic foundation, physical power leakage &amp; Boolean masking.</a:t>
+            </a:r>
+          </a:p>
+          <a:p>
+            <a:r>
+              <a:rPr sz="1500" b="1">
                 <a:solidFill>
                   <a:srgbClr val="0F2557"/>
                 </a:solidFill>
-                <a:latin typeface="Segoe UI"/>
-              </a:defRPr>
-            </a:pPr>
-            <a:r>
+                <a:latin typeface="Times New Roman"/>
+              </a:rPr>
               <a:t>2. Objectives</a:t>
             </a:r>
           </a:p>
           <a:p>
             <a:pPr>
-              <a:defRPr sz="1000">
-                <a:solidFill>
-                  <a:srgbClr val="64748B"/>
-                </a:solidFill>
-                <a:latin typeface="Segoe UI"/>
-              </a:defRPr>
-            </a:pPr>
-            <a:r>
-              <a:t>Core measurable milestones spanning RTL modeling, Vivado synthesis &amp; TVLA assessment.</a:t>
-            </a:r>
-          </a:p>
-        </p:txBody>
-      </p:sp>
-      <p:sp>
-        <p:nvSpPr>
-          <p:cNvPr id="12" name="Rounded Rectangle 11"/>
-          <p:cNvSpPr/>
-          <p:nvPr/>
-        </p:nvSpPr>
-        <p:spPr>
-          <a:xfrm>
-            <a:off x="548640" y="3977639"/>
-            <a:ext cx="5394960" cy="1005840"/>
-          </a:xfrm>
-          <a:prstGeom prst="roundRect">
-            <a:avLst/>
-          </a:prstGeom>
-          <a:solidFill>
-            <a:srgbClr val="F8FAFC"/>
-          </a:solidFill>
-          <a:ln w="12700">
-            <a:solidFill>
-              <a:srgbClr val="E2E8F0"/>
-            </a:solidFill>
-          </a:ln>
-        </p:spPr>
-        <p:style>
-          <a:lnRef idx="1">
-            <a:schemeClr val="accent1"/>
-          </a:lnRef>
-          <a:fillRef idx="3">
-            <a:schemeClr val="accent1"/>
-          </a:fillRef>
-          <a:effectRef idx="2">
-            <a:schemeClr val="accent1"/>
-          </a:effectRef>
-          <a:fontRef idx="minor">
-            <a:schemeClr val="lt1"/>
-          </a:fontRef>
-        </p:style>
-        <p:txBody>
-          <a:bodyPr rtlCol="0" anchor="ctr" wrap="square" lIns="137160" tIns="91440"/>
-          <a:lstStyle/>
-          <a:p>
-            <a:pPr algn="ctr">
-              <a:defRPr sz="1300" b="1">
+              <a:spcAft>
+                <a:spcPts val="1800"/>
+              </a:spcAft>
+            </a:pPr>
+            <a:r>
+              <a:rPr sz="1150">
+                <a:solidFill>
+                  <a:srgbClr val="6B7280"/>
+                </a:solidFill>
+                <a:latin typeface="Calibri"/>
+              </a:rPr>
+              <a:t>5 core measurable engineering and verification milestones.</a:t>
+            </a:r>
+          </a:p>
+          <a:p>
+            <a:r>
+              <a:rPr sz="1500" b="1">
                 <a:solidFill>
                   <a:srgbClr val="0F2557"/>
                 </a:solidFill>
-                <a:latin typeface="Segoe UI"/>
-              </a:defRPr>
-            </a:pPr>
-            <a:r>
+                <a:latin typeface="Times New Roman"/>
+              </a:rPr>
               <a:t>3. Proposed Improvement Over Existing Works</a:t>
             </a:r>
           </a:p>
           <a:p>
             <a:pPr>
-              <a:defRPr sz="1000">
-                <a:solidFill>
-                  <a:srgbClr val="64748B"/>
-                </a:solidFill>
-                <a:latin typeface="Segoe UI"/>
-              </a:defRPr>
-            </a:pPr>
-            <a:r>
-              <a:t>Systematic comparative benchmark against IEEE JSSC Base Paper (Kumar et al. 2023).</a:t>
-            </a:r>
-          </a:p>
-        </p:txBody>
-      </p:sp>
-      <p:sp>
-        <p:nvSpPr>
-          <p:cNvPr id="13" name="Rounded Rectangle 12"/>
-          <p:cNvSpPr/>
-          <p:nvPr/>
-        </p:nvSpPr>
-        <p:spPr>
-          <a:xfrm>
-            <a:off x="548640" y="5120640"/>
-            <a:ext cx="5394960" cy="1005840"/>
-          </a:xfrm>
-          <a:prstGeom prst="roundRect">
-            <a:avLst/>
-          </a:prstGeom>
-          <a:solidFill>
-            <a:srgbClr val="F8FAFC"/>
-          </a:solidFill>
-          <a:ln w="12700">
-            <a:solidFill>
-              <a:srgbClr val="E2E8F0"/>
-            </a:solidFill>
-          </a:ln>
-        </p:spPr>
-        <p:style>
-          <a:lnRef idx="1">
-            <a:schemeClr val="accent1"/>
-          </a:lnRef>
-          <a:fillRef idx="3">
-            <a:schemeClr val="accent1"/>
-          </a:fillRef>
-          <a:effectRef idx="2">
-            <a:schemeClr val="accent1"/>
-          </a:effectRef>
-          <a:fontRef idx="minor">
-            <a:schemeClr val="lt1"/>
-          </a:fontRef>
-        </p:style>
-        <p:txBody>
-          <a:bodyPr rtlCol="0" anchor="ctr" wrap="square" lIns="137160" tIns="91440"/>
-          <a:lstStyle/>
-          <a:p>
-            <a:pPr algn="ctr">
-              <a:defRPr sz="1300" b="1">
+              <a:spcAft>
+                <a:spcPts val="1800"/>
+              </a:spcAft>
+            </a:pPr>
+            <a:r>
+              <a:rPr sz="1150">
+                <a:solidFill>
+                  <a:srgbClr val="6B7280"/>
+                </a:solidFill>
+                <a:latin typeface="Calibri"/>
+              </a:rPr>
+              <a:t>Comparative benchmark against IEEE JSSC Base Paper.</a:t>
+            </a:r>
+          </a:p>
+          <a:p>
+            <a:r>
+              <a:rPr sz="1500" b="1">
                 <a:solidFill>
                   <a:srgbClr val="0F2557"/>
                 </a:solidFill>
-                <a:latin typeface="Segoe UI"/>
-              </a:defRPr>
-            </a:pPr>
-            <a:r>
-              <a:t>4. Methodology / Flowchart</a:t>
+                <a:latin typeface="Times New Roman"/>
+              </a:rPr>
+              <a:t>4. Methodology/ Flowchart</a:t>
             </a:r>
           </a:p>
           <a:p>
             <a:pPr>
-              <a:defRPr sz="1000">
-                <a:solidFill>
-                  <a:srgbClr val="64748B"/>
-                </a:solidFill>
-                <a:latin typeface="Segoe UI"/>
-              </a:defRPr>
-            </a:pPr>
-            <a:r>
-              <a:t>Two-share masked datapath architecture &amp; 4-stage EDA engineering design flow.</a:t>
-            </a:r>
-          </a:p>
-        </p:txBody>
-      </p:sp>
-      <p:sp>
-        <p:nvSpPr>
-          <p:cNvPr id="14" name="Rounded Rectangle 13"/>
-          <p:cNvSpPr/>
+              <a:spcAft>
+                <a:spcPts val="1800"/>
+              </a:spcAft>
+            </a:pPr>
+            <a:r>
+              <a:rPr sz="1150">
+                <a:solidFill>
+                  <a:srgbClr val="6B7280"/>
+                </a:solidFill>
+                <a:latin typeface="Calibri"/>
+              </a:rPr>
+              <a:t>Two-share masked datapath architecture &amp; 4-stage EDA engineering flow.</a:t>
+            </a:r>
+          </a:p>
+        </p:txBody>
+      </p:sp>
+      <p:sp>
+        <p:nvSpPr>
+          <p:cNvPr id="11" name="TextBox 10"/>
+          <p:cNvSpPr txBox="1"/>
           <p:nvPr/>
         </p:nvSpPr>
         <p:spPr>
           <a:xfrm>
             <a:off x="6217920" y="1691640"/>
-            <a:ext cx="5394960" cy="1005840"/>
-          </a:xfrm>
-          <a:prstGeom prst="roundRect">
-            <a:avLst/>
-          </a:prstGeom>
-          <a:solidFill>
-            <a:srgbClr val="F8FAFC"/>
-          </a:solidFill>
-          <a:ln w="12700">
-            <a:solidFill>
-              <a:srgbClr val="E2E8F0"/>
-            </a:solidFill>
-          </a:ln>
-        </p:spPr>
-        <p:style>
-          <a:lnRef idx="1">
-            <a:schemeClr val="accent1"/>
-          </a:lnRef>
-          <a:fillRef idx="3">
-            <a:schemeClr val="accent1"/>
-          </a:fillRef>
-          <a:effectRef idx="2">
-            <a:schemeClr val="accent1"/>
-          </a:effectRef>
-          <a:fontRef idx="minor">
-            <a:schemeClr val="lt1"/>
-          </a:fontRef>
-        </p:style>
-        <p:txBody>
-          <a:bodyPr rtlCol="0" anchor="ctr" wrap="square" lIns="137160" tIns="91440"/>
-          <a:lstStyle/>
-          <a:p>
-            <a:pPr algn="ctr">
-              <a:defRPr sz="1300" b="1">
+            <a:ext cx="4937760" cy="4389120"/>
+          </a:xfrm>
+          <a:prstGeom prst="rect">
+            <a:avLst/>
+          </a:prstGeom>
+          <a:noFill/>
+        </p:spPr>
+        <p:txBody>
+          <a:bodyPr wrap="square">
+            <a:spAutoFit/>
+          </a:bodyPr>
+          <a:lstStyle/>
+          <a:p>
+            <a:r>
+              <a:rPr sz="1500" b="1">
                 <a:solidFill>
                   <a:srgbClr val="0F2557"/>
                 </a:solidFill>
-                <a:latin typeface="Segoe UI"/>
-              </a:defRPr>
-            </a:pPr>
-            <a:r>
+                <a:latin typeface="Times New Roman"/>
+              </a:rPr>
               <a:t>5. Work Done till Date and Results Obtained</a:t>
             </a:r>
           </a:p>
           <a:p>
             <a:pPr>
-              <a:defRPr sz="1000">
-                <a:solidFill>
-                  <a:srgbClr val="64748B"/>
-                </a:solidFill>
-                <a:latin typeface="Segoe UI"/>
-              </a:defRPr>
-            </a:pPr>
-            <a:r>
-              <a:t>NIST FIPS 197 verification, Vivado Artix-7 synthesis tables &amp; verified simulation waveforms.</a:t>
-            </a:r>
-          </a:p>
-        </p:txBody>
-      </p:sp>
-      <p:sp>
-        <p:nvSpPr>
-          <p:cNvPr id="15" name="Rounded Rectangle 14"/>
-          <p:cNvSpPr/>
-          <p:nvPr/>
-        </p:nvSpPr>
-        <p:spPr>
-          <a:xfrm>
-            <a:off x="6217920" y="2834640"/>
-            <a:ext cx="5394960" cy="1005840"/>
-          </a:xfrm>
-          <a:prstGeom prst="roundRect">
-            <a:avLst/>
-          </a:prstGeom>
-          <a:solidFill>
-            <a:srgbClr val="F8FAFC"/>
-          </a:solidFill>
-          <a:ln w="12700">
-            <a:solidFill>
-              <a:srgbClr val="E2E8F0"/>
-            </a:solidFill>
-          </a:ln>
-        </p:spPr>
-        <p:style>
-          <a:lnRef idx="1">
-            <a:schemeClr val="accent1"/>
-          </a:lnRef>
-          <a:fillRef idx="3">
-            <a:schemeClr val="accent1"/>
-          </a:fillRef>
-          <a:effectRef idx="2">
-            <a:schemeClr val="accent1"/>
-          </a:effectRef>
-          <a:fontRef idx="minor">
-            <a:schemeClr val="lt1"/>
-          </a:fontRef>
-        </p:style>
-        <p:txBody>
-          <a:bodyPr rtlCol="0" anchor="ctr" wrap="square" lIns="137160" tIns="91440"/>
-          <a:lstStyle/>
-          <a:p>
-            <a:pPr algn="ctr">
-              <a:defRPr sz="1300" b="1">
+              <a:spcAft>
+                <a:spcPts val="1800"/>
+              </a:spcAft>
+            </a:pPr>
+            <a:r>
+              <a:rPr sz="1150">
+                <a:solidFill>
+                  <a:srgbClr val="6B7280"/>
+                </a:solidFill>
+                <a:latin typeface="Calibri"/>
+              </a:rPr>
+              <a:t>NIST verification, Vivado Artix-7 synthesis tables &amp; timing waveforms.</a:t>
+            </a:r>
+          </a:p>
+          <a:p>
+            <a:r>
+              <a:rPr sz="1500" b="1">
                 <a:solidFill>
                   <a:srgbClr val="0F2557"/>
                 </a:solidFill>
-                <a:latin typeface="Segoe UI"/>
-              </a:defRPr>
-            </a:pPr>
-            <a:r>
+                <a:latin typeface="Times New Roman"/>
+              </a:rPr>
               <a:t>6. Project Implementation Budget Analysis</a:t>
             </a:r>
           </a:p>
           <a:p>
             <a:pPr>
-              <a:defRPr sz="1000">
-                <a:solidFill>
-                  <a:srgbClr val="64748B"/>
-                </a:solidFill>
-                <a:latin typeface="Segoe UI"/>
-              </a:defRPr>
-            </a:pPr>
-            <a:r>
-              <a:t>Cost breakdown table of academic EDA software vs. proposed physical prototyping.</a:t>
-            </a:r>
-          </a:p>
-        </p:txBody>
-      </p:sp>
-      <p:sp>
-        <p:nvSpPr>
-          <p:cNvPr id="16" name="Rounded Rectangle 15"/>
-          <p:cNvSpPr/>
-          <p:nvPr/>
-        </p:nvSpPr>
-        <p:spPr>
-          <a:xfrm>
-            <a:off x="6217920" y="3977639"/>
-            <a:ext cx="5394960" cy="1005840"/>
-          </a:xfrm>
-          <a:prstGeom prst="roundRect">
-            <a:avLst/>
-          </a:prstGeom>
-          <a:solidFill>
-            <a:srgbClr val="F8FAFC"/>
-          </a:solidFill>
-          <a:ln w="12700">
-            <a:solidFill>
-              <a:srgbClr val="E2E8F0"/>
-            </a:solidFill>
-          </a:ln>
-        </p:spPr>
-        <p:style>
-          <a:lnRef idx="1">
-            <a:schemeClr val="accent1"/>
-          </a:lnRef>
-          <a:fillRef idx="3">
-            <a:schemeClr val="accent1"/>
-          </a:fillRef>
-          <a:effectRef idx="2">
-            <a:schemeClr val="accent1"/>
-          </a:effectRef>
-          <a:fontRef idx="minor">
-            <a:schemeClr val="lt1"/>
-          </a:fontRef>
-        </p:style>
-        <p:txBody>
-          <a:bodyPr rtlCol="0" anchor="ctr" wrap="square" lIns="137160" tIns="91440"/>
-          <a:lstStyle/>
-          <a:p>
-            <a:pPr algn="ctr">
-              <a:defRPr sz="1300" b="1">
+              <a:spcAft>
+                <a:spcPts val="1800"/>
+              </a:spcAft>
+            </a:pPr>
+            <a:r>
+              <a:rPr sz="1150">
+                <a:solidFill>
+                  <a:srgbClr val="6B7280"/>
+                </a:solidFill>
+                <a:latin typeface="Calibri"/>
+              </a:rPr>
+              <a:t>Cost breakdown table of academic EDA software vs. proposed prototyping.</a:t>
+            </a:r>
+          </a:p>
+          <a:p>
+            <a:r>
+              <a:rPr sz="1500" b="1">
                 <a:solidFill>
                   <a:srgbClr val="0F2557"/>
                 </a:solidFill>
-                <a:latin typeface="Segoe UI"/>
-              </a:defRPr>
-            </a:pPr>
-            <a:r>
+                <a:latin typeface="Times New Roman"/>
+              </a:rPr>
               <a:t>7. Next Month Plan of Work</a:t>
             </a:r>
           </a:p>
           <a:p>
             <a:pPr>
-              <a:defRPr sz="1000">
-                <a:solidFill>
-                  <a:srgbClr val="64748B"/>
-                </a:solidFill>
-                <a:latin typeface="Segoe UI"/>
-              </a:defRPr>
-            </a:pPr>
-            <a:r>
-              <a:t>Action plan detailing on-chip PRNG integration, Canright S-Box &amp; TVLA evaluation.</a:t>
-            </a:r>
-          </a:p>
-        </p:txBody>
-      </p:sp>
-      <p:sp>
-        <p:nvSpPr>
-          <p:cNvPr id="17" name="Rounded Rectangle 16"/>
-          <p:cNvSpPr/>
-          <p:nvPr/>
-        </p:nvSpPr>
-        <p:spPr>
-          <a:xfrm>
-            <a:off x="6217920" y="5120640"/>
-            <a:ext cx="5394960" cy="1005840"/>
-          </a:xfrm>
-          <a:prstGeom prst="roundRect">
-            <a:avLst/>
-          </a:prstGeom>
-          <a:solidFill>
-            <a:srgbClr val="F8FAFC"/>
-          </a:solidFill>
-          <a:ln w="12700">
-            <a:solidFill>
-              <a:srgbClr val="E2E8F0"/>
-            </a:solidFill>
-          </a:ln>
-        </p:spPr>
-        <p:style>
-          <a:lnRef idx="1">
-            <a:schemeClr val="accent1"/>
-          </a:lnRef>
-          <a:fillRef idx="3">
-            <a:schemeClr val="accent1"/>
-          </a:fillRef>
-          <a:effectRef idx="2">
-            <a:schemeClr val="accent1"/>
-          </a:effectRef>
-          <a:fontRef idx="minor">
-            <a:schemeClr val="lt1"/>
-          </a:fontRef>
-        </p:style>
-        <p:txBody>
-          <a:bodyPr rtlCol="0" anchor="ctr" wrap="square" lIns="137160" tIns="91440"/>
-          <a:lstStyle/>
-          <a:p>
-            <a:pPr algn="ctr">
-              <a:defRPr sz="1300" b="1">
+              <a:spcAft>
+                <a:spcPts val="1800"/>
+              </a:spcAft>
+            </a:pPr>
+            <a:r>
+              <a:rPr sz="1150">
+                <a:solidFill>
+                  <a:srgbClr val="6B7280"/>
+                </a:solidFill>
+                <a:latin typeface="Calibri"/>
+              </a:rPr>
+              <a:t>Action plan covering on-chip PRNG integration, Canright S-Box &amp; TVLA.</a:t>
+            </a:r>
+          </a:p>
+          <a:p>
+            <a:r>
+              <a:rPr sz="1500" b="1">
                 <a:solidFill>
                   <a:srgbClr val="0F2557"/>
                 </a:solidFill>
-                <a:latin typeface="Segoe UI"/>
-              </a:defRPr>
-            </a:pPr>
-            <a:r>
+                <a:latin typeface="Times New Roman"/>
+              </a:rPr>
               <a:t>8. References</a:t>
             </a:r>
           </a:p>
           <a:p>
             <a:pPr>
-              <a:defRPr sz="1000">
-                <a:solidFill>
-                  <a:srgbClr val="64748B"/>
-                </a:solidFill>
-                <a:latin typeface="Segoe UI"/>
-              </a:defRPr>
-            </a:pPr>
-            <a:r>
-              <a:t>Formal IEEE bibliographical citations backing the theoretical &amp; experimental framework.</a:t>
+              <a:spcAft>
+                <a:spcPts val="1800"/>
+              </a:spcAft>
+            </a:pPr>
+            <a:r>
+              <a:rPr sz="1150">
+                <a:solidFill>
+                  <a:srgbClr val="6B7280"/>
+                </a:solidFill>
+                <a:latin typeface="Calibri"/>
+              </a:rPr>
+              <a:t>Formal IEEE bibliographical citations backing the project.</a:t>
             </a:r>
           </a:p>
         </p:txBody>
@@ -8509,7 +7772,7 @@
             <a:avLst/>
           </a:prstGeom>
           <a:solidFill>
-            <a:srgbClr val="9CA3AF"/>
+            <a:srgbClr val="A0A0A0"/>
           </a:solidFill>
           <a:ln>
             <a:noFill/>
@@ -8546,7 +7809,7 @@
         <p:spPr>
           <a:xfrm>
             <a:off x="365760" y="868680"/>
-            <a:ext cx="11460175" cy="621792"/>
+            <a:ext cx="11460175" cy="594360"/>
           </a:xfrm>
           <a:prstGeom prst="rect">
             <a:avLst/>
@@ -8581,7 +7844,7 @@
                 <a:solidFill>
                   <a:srgbClr val="FFFFFF"/>
                 </a:solidFill>
-                <a:latin typeface="Segoe UI"/>
+                <a:latin typeface="Times New Roman"/>
               </a:defRPr>
             </a:pPr>
             <a:r>
@@ -8615,9 +7878,9 @@
             <a:pPr>
               <a:defRPr sz="1000">
                 <a:solidFill>
-                  <a:srgbClr val="64748B"/>
-                </a:solidFill>
-                <a:latin typeface="Segoe UI"/>
+                  <a:srgbClr val="6B7280"/>
+                </a:solidFill>
+                <a:latin typeface="Times New Roman"/>
               </a:defRPr>
             </a:pPr>
             <a:r>
@@ -8651,9 +7914,9 @@
             <a:pPr algn="r">
               <a:defRPr sz="1000">
                 <a:solidFill>
-                  <a:srgbClr val="64748B"/>
-                </a:solidFill>
-                <a:latin typeface="Segoe UI"/>
+                  <a:srgbClr val="6B7280"/>
+                </a:solidFill>
+                <a:latin typeface="Times New Roman"/>
               </a:defRPr>
             </a:pPr>
             <a:r>
@@ -8664,243 +7927,183 @@
       </p:sp>
       <p:sp>
         <p:nvSpPr>
-          <p:cNvPr id="10" name="Rounded Rectangle 9"/>
-          <p:cNvSpPr/>
+          <p:cNvPr id="10" name="TextBox 9"/>
+          <p:cNvSpPr txBox="1"/>
           <p:nvPr/>
         </p:nvSpPr>
         <p:spPr>
           <a:xfrm>
             <a:off x="548640" y="1691640"/>
-            <a:ext cx="11094415" cy="1371600"/>
-          </a:xfrm>
-          <a:prstGeom prst="roundRect">
-            <a:avLst/>
-          </a:prstGeom>
-          <a:solidFill>
-            <a:srgbClr val="F8FAFC"/>
-          </a:solidFill>
-          <a:ln w="19050">
-            <a:solidFill>
-              <a:srgbClr val="2563EB"/>
-            </a:solidFill>
-          </a:ln>
-        </p:spPr>
-        <p:style>
-          <a:lnRef idx="1">
-            <a:schemeClr val="accent1"/>
-          </a:lnRef>
-          <a:fillRef idx="3">
-            <a:schemeClr val="accent1"/>
-          </a:fillRef>
-          <a:effectRef idx="2">
-            <a:schemeClr val="accent1"/>
-          </a:effectRef>
-          <a:fontRef idx="minor">
-            <a:schemeClr val="lt1"/>
-          </a:fontRef>
-        </p:style>
-        <p:txBody>
-          <a:bodyPr rtlCol="0" anchor="ctr" wrap="square" lIns="228600" tIns="109728"/>
-          <a:lstStyle/>
-          <a:p>
-            <a:pPr algn="ctr">
-              <a:defRPr sz="1400" b="1">
+            <a:ext cx="11094415" cy="4572000"/>
+          </a:xfrm>
+          <a:prstGeom prst="rect">
+            <a:avLst/>
+          </a:prstGeom>
+          <a:noFill/>
+        </p:spPr>
+        <p:txBody>
+          <a:bodyPr wrap="square">
+            <a:spAutoFit/>
+          </a:bodyPr>
+          <a:lstStyle/>
+          <a:p>
+            <a:pPr>
+              <a:spcAft>
+                <a:spcPts val="400"/>
+              </a:spcAft>
+            </a:pPr>
+            <a:r>
+              <a:rPr sz="1400" b="1">
                 <a:solidFill>
                   <a:srgbClr val="0F2557"/>
                 </a:solidFill>
-                <a:latin typeface="Segoe UI"/>
-              </a:defRPr>
-            </a:pPr>
-            <a:r>
-              <a:t>• Cryptographic Foundation (NIST FIPS 197):</a:t>
+                <a:latin typeface="Times New Roman"/>
+              </a:rPr>
+              <a:t>• Cryptographic Foundation (AES-128):</a:t>
             </a:r>
           </a:p>
           <a:p>
             <a:pPr>
-              <a:defRPr sz="1150">
-                <a:solidFill>
-                  <a:srgbClr val="1E293B"/>
-                </a:solidFill>
-                <a:latin typeface="Segoe UI"/>
-              </a:defRPr>
-            </a:pPr>
-            <a:r>
-              <a:t>   – Advanced Encryption Standard (AES-128): is the standardized symmetric block cipher safeguarding critical communications in IoT, smart grids, defense systems, and cloud infrastructure.</a:t>
+              <a:spcAft>
+                <a:spcPts val="300"/>
+              </a:spcAft>
+            </a:pPr>
+            <a:r>
+              <a:rPr sz="1200">
+                <a:solidFill>
+                  <a:srgbClr val="1F2937"/>
+                </a:solidFill>
+                <a:latin typeface="Calibri"/>
+              </a:rPr>
+              <a:t>– Advanced Encryption Standard (AES) is a symmetric block cipher standardized by NIST (FIPS 197).</a:t>
             </a:r>
           </a:p>
           <a:p>
             <a:pPr>
-              <a:defRPr sz="1150">
-                <a:solidFill>
-                  <a:srgbClr val="1E293B"/>
-                </a:solidFill>
-                <a:latin typeface="Segoe UI"/>
-              </a:defRPr>
-            </a:pPr>
-            <a:r>
-              <a:t>   – Iterative 10-Round Structure: transforms 128-bit plaintext blocks via SubBytes (non-linear S-box), ShiftRows (byte permutations), MixColumns (Galois matrix multiply), and AddRoundKey.</a:t>
-            </a:r>
-          </a:p>
-        </p:txBody>
-      </p:sp>
-      <p:sp>
-        <p:nvSpPr>
-          <p:cNvPr id="11" name="Rounded Rectangle 10"/>
-          <p:cNvSpPr/>
-          <p:nvPr/>
-        </p:nvSpPr>
-        <p:spPr>
-          <a:xfrm>
-            <a:off x="548640" y="3200400"/>
-            <a:ext cx="11094415" cy="1371600"/>
-          </a:xfrm>
-          <a:prstGeom prst="roundRect">
-            <a:avLst/>
-          </a:prstGeom>
-          <a:solidFill>
-            <a:srgbClr val="F8FAFC"/>
-          </a:solidFill>
-          <a:ln w="19050">
-            <a:solidFill>
-              <a:srgbClr val="2563EB"/>
-            </a:solidFill>
-          </a:ln>
-        </p:spPr>
-        <p:style>
-          <a:lnRef idx="1">
-            <a:schemeClr val="accent1"/>
-          </a:lnRef>
-          <a:fillRef idx="3">
-            <a:schemeClr val="accent1"/>
-          </a:fillRef>
-          <a:effectRef idx="2">
-            <a:schemeClr val="accent1"/>
-          </a:effectRef>
-          <a:fontRef idx="minor">
-            <a:schemeClr val="lt1"/>
-          </a:fontRef>
-        </p:style>
-        <p:txBody>
-          <a:bodyPr rtlCol="0" anchor="ctr" wrap="square" lIns="228600" tIns="109728"/>
-          <a:lstStyle/>
-          <a:p>
-            <a:pPr algn="ctr">
-              <a:defRPr sz="1400" b="1">
+              <a:spcAft>
+                <a:spcPts val="300"/>
+              </a:spcAft>
+            </a:pPr>
+            <a:r>
+              <a:rPr sz="1200">
+                <a:solidFill>
+                  <a:srgbClr val="1F2937"/>
+                </a:solidFill>
+                <a:latin typeface="Calibri"/>
+              </a:rPr>
+              <a:t>– Operates on 128-bit data blocks using a 128-bit key across 10 algorithmic rounds (SubBytes, ShiftRows, MixColumns, AddRoundKey).</a:t>
+            </a:r>
+          </a:p>
+          <a:p>
+            <a:pPr>
+              <a:spcAft>
+                <a:spcPts val="1400"/>
+              </a:spcAft>
+            </a:pPr>
+            <a:r>
+              <a:rPr sz="1200">
+                <a:solidFill>
+                  <a:srgbClr val="1F2937"/>
+                </a:solidFill>
+                <a:latin typeface="Calibri"/>
+              </a:rPr>
+              <a:t>– Widely deployed for data protection in embedded systems, smart cards, IoT nodes, and telecommunications.</a:t>
+            </a:r>
+          </a:p>
+          <a:p>
+            <a:pPr>
+              <a:spcAft>
+                <a:spcPts val="400"/>
+              </a:spcAft>
+            </a:pPr>
+            <a:r>
+              <a:rPr sz="1400" b="1">
                 <a:solidFill>
                   <a:srgbClr val="0F2557"/>
                 </a:solidFill>
-                <a:latin typeface="Segoe UI"/>
-              </a:defRPr>
-            </a:pPr>
-            <a:r>
-              <a:t>• Physical Hardware Vulnerability (Side-Channel Power Leakage):</a:t>
+                <a:latin typeface="Times New Roman"/>
+              </a:rPr>
+              <a:t>• Physical Hardware Vulnerability (Side-Channel Leakage):</a:t>
             </a:r>
           </a:p>
           <a:p>
             <a:pPr>
-              <a:defRPr sz="1150">
-                <a:solidFill>
-                  <a:srgbClr val="1E293B"/>
-                </a:solidFill>
-                <a:latin typeface="Segoe UI"/>
-              </a:defRPr>
-            </a:pPr>
-            <a:r>
-              <a:t>   – CMOS Switching Power Consumption: varies dynamically based on processed data: P_dyn = α · C_L · V_dd² · f. Attackers monitor supply current or EM emissions.</a:t>
+              <a:spcAft>
+                <a:spcPts val="300"/>
+              </a:spcAft>
+            </a:pPr>
+            <a:r>
+              <a:rPr sz="1200">
+                <a:solidFill>
+                  <a:srgbClr val="1F2937"/>
+                </a:solidFill>
+                <a:latin typeface="Calibri"/>
+              </a:rPr>
+              <a:t>– While mathematically secure against cryptanalysis, CMOS implementations leak data-dependent power during switching.</a:t>
             </a:r>
           </a:p>
           <a:p>
             <a:pPr>
-              <a:defRPr sz="1150">
-                <a:solidFill>
-                  <a:srgbClr val="1E293B"/>
-                </a:solidFill>
-                <a:latin typeface="Segoe UI"/>
-              </a:defRPr>
-            </a:pPr>
-            <a:r>
-              <a:t>   – DPA &amp; CPA Attacks: exploit statistical correlation between physical power traces and intermediate Hamming Weight / Distance to extract master secret keys non-invasively within minutes.</a:t>
-            </a:r>
-          </a:p>
-        </p:txBody>
-      </p:sp>
-      <p:sp>
-        <p:nvSpPr>
-          <p:cNvPr id="12" name="Rounded Rectangle 11"/>
-          <p:cNvSpPr/>
-          <p:nvPr/>
-        </p:nvSpPr>
-        <p:spPr>
-          <a:xfrm>
-            <a:off x="548640" y="4709160"/>
-            <a:ext cx="11094415" cy="1371600"/>
-          </a:xfrm>
-          <a:prstGeom prst="roundRect">
-            <a:avLst/>
-          </a:prstGeom>
-          <a:solidFill>
-            <a:srgbClr val="F8FAFC"/>
-          </a:solidFill>
-          <a:ln w="19050">
-            <a:solidFill>
-              <a:srgbClr val="2563EB"/>
-            </a:solidFill>
-          </a:ln>
-        </p:spPr>
-        <p:style>
-          <a:lnRef idx="1">
-            <a:schemeClr val="accent1"/>
-          </a:lnRef>
-          <a:fillRef idx="3">
-            <a:schemeClr val="accent1"/>
-          </a:fillRef>
-          <a:effectRef idx="2">
-            <a:schemeClr val="accent1"/>
-          </a:effectRef>
-          <a:fontRef idx="minor">
-            <a:schemeClr val="lt1"/>
-          </a:fontRef>
-        </p:style>
-        <p:txBody>
-          <a:bodyPr rtlCol="0" anchor="ctr" wrap="square" lIns="228600" tIns="109728"/>
-          <a:lstStyle/>
-          <a:p>
-            <a:pPr algn="ctr">
-              <a:defRPr sz="1400" b="1">
+              <a:spcAft>
+                <a:spcPts val="1400"/>
+              </a:spcAft>
+            </a:pPr>
+            <a:r>
+              <a:rPr sz="1200">
+                <a:solidFill>
+                  <a:srgbClr val="1F2937"/>
+                </a:solidFill>
+                <a:latin typeface="Calibri"/>
+              </a:rPr>
+              <a:t>– Attackers exploit power consumption variations via Differential Power Analysis (DPA) and Correlation Power Analysis (CPA) to extract the secret key.</a:t>
+            </a:r>
+          </a:p>
+          <a:p>
+            <a:pPr>
+              <a:spcAft>
+                <a:spcPts val="400"/>
+              </a:spcAft>
+            </a:pPr>
+            <a:r>
+              <a:rPr sz="1400" b="1">
                 <a:solidFill>
                   <a:srgbClr val="0F2557"/>
                 </a:solidFill>
-                <a:latin typeface="Segoe UI"/>
-              </a:defRPr>
-            </a:pPr>
-            <a:r>
-              <a:t>• Hardware Countermeasure (First-Order Boolean Masking):</a:t>
+                <a:latin typeface="Times New Roman"/>
+              </a:rPr>
+              <a:t>• Proposed Countermeasure (First-Order Boolean Masking):</a:t>
             </a:r>
           </a:p>
           <a:p>
             <a:pPr>
-              <a:defRPr sz="1150">
-                <a:solidFill>
-                  <a:srgbClr val="1E293B"/>
-                </a:solidFill>
-                <a:latin typeface="Segoe UI"/>
-              </a:defRPr>
-            </a:pPr>
-            <a:r>
-              <a:t>   – Two-Share Secret Sharing: decorrelates power consumption from secret data by splitting sensitive states: X' = X ⊕ M, where M is a uniformly random mask.</a:t>
+              <a:spcAft>
+                <a:spcPts val="300"/>
+              </a:spcAft>
+            </a:pPr>
+            <a:r>
+              <a:rPr sz="1200">
+                <a:solidFill>
+                  <a:srgbClr val="1F2937"/>
+                </a:solidFill>
+                <a:latin typeface="Calibri"/>
+              </a:rPr>
+              <a:t>– Splits sensitive intermediate variables into random shares (X' = X ⊕ M) to decorrelate physical power consumption from secret data.</a:t>
             </a:r>
           </a:p>
           <a:p>
             <a:pPr>
-              <a:defRPr sz="1150">
-                <a:solidFill>
-                  <a:srgbClr val="1E293B"/>
-                </a:solidFill>
-                <a:latin typeface="Segoe UI"/>
-              </a:defRPr>
-            </a:pPr>
-            <a:r>
-              <a:t>   – Datapath Synchronization: Linear layers (ShiftRows/MixColumns) process both shares in parallel; non-linear S-box requires dynamic mask refresh to eliminate first-order leakage.</a:t>
+              <a:spcAft>
+                <a:spcPts val="1400"/>
+              </a:spcAft>
+            </a:pPr>
+            <a:r>
+              <a:rPr sz="1200">
+                <a:solidFill>
+                  <a:srgbClr val="1F2937"/>
+                </a:solidFill>
+                <a:latin typeface="Calibri"/>
+              </a:rPr>
+              <a:t>– Integrates a protected non-linear S-box and dynamic mask-refreshing logic to eliminate first-order leakage.</a:t>
             </a:r>
           </a:p>
         </p:txBody>
@@ -9072,7 +8275,7 @@
             <a:avLst/>
           </a:prstGeom>
           <a:solidFill>
-            <a:srgbClr val="9CA3AF"/>
+            <a:srgbClr val="A0A0A0"/>
           </a:solidFill>
           <a:ln>
             <a:noFill/>
@@ -9109,7 +8312,7 @@
         <p:spPr>
           <a:xfrm>
             <a:off x="365760" y="868680"/>
-            <a:ext cx="11460175" cy="621792"/>
+            <a:ext cx="11460175" cy="594360"/>
           </a:xfrm>
           <a:prstGeom prst="rect">
             <a:avLst/>
@@ -9144,7 +8347,7 @@
                 <a:solidFill>
                   <a:srgbClr val="FFFFFF"/>
                 </a:solidFill>
-                <a:latin typeface="Segoe UI"/>
+                <a:latin typeface="Times New Roman"/>
               </a:defRPr>
             </a:pPr>
             <a:r>
@@ -9178,9 +8381,9 @@
             <a:pPr>
               <a:defRPr sz="1000">
                 <a:solidFill>
-                  <a:srgbClr val="64748B"/>
-                </a:solidFill>
-                <a:latin typeface="Segoe UI"/>
+                  <a:srgbClr val="6B7280"/>
+                </a:solidFill>
+                <a:latin typeface="Times New Roman"/>
               </a:defRPr>
             </a:pPr>
             <a:r>
@@ -9214,9 +8417,9 @@
             <a:pPr algn="r">
               <a:defRPr sz="1000">
                 <a:solidFill>
-                  <a:srgbClr val="64748B"/>
-                </a:solidFill>
-                <a:latin typeface="Segoe UI"/>
+                  <a:srgbClr val="6B7280"/>
+                </a:solidFill>
+                <a:latin typeface="Times New Roman"/>
               </a:defRPr>
             </a:pPr>
             <a:r>
@@ -9227,340 +8430,183 @@
       </p:sp>
       <p:sp>
         <p:nvSpPr>
-          <p:cNvPr id="10" name="Rounded Rectangle 9"/>
-          <p:cNvSpPr/>
+          <p:cNvPr id="10" name="TextBox 9"/>
+          <p:cNvSpPr txBox="1"/>
           <p:nvPr/>
         </p:nvSpPr>
         <p:spPr>
           <a:xfrm>
             <a:off x="548640" y="1645920"/>
-            <a:ext cx="11094415" cy="804672"/>
-          </a:xfrm>
-          <a:prstGeom prst="roundRect">
-            <a:avLst/>
-          </a:prstGeom>
-          <a:solidFill>
-            <a:srgbClr val="F8FAFC"/>
-          </a:solidFill>
-          <a:ln w="15240">
-            <a:solidFill>
-              <a:srgbClr val="0F2557"/>
-            </a:solidFill>
-          </a:ln>
-        </p:spPr>
-        <p:style>
-          <a:lnRef idx="1">
-            <a:schemeClr val="accent1"/>
-          </a:lnRef>
-          <a:fillRef idx="3">
-            <a:schemeClr val="accent1"/>
-          </a:fillRef>
-          <a:effectRef idx="2">
-            <a:schemeClr val="accent1"/>
-          </a:effectRef>
-          <a:fontRef idx="minor">
-            <a:schemeClr val="lt1"/>
-          </a:fontRef>
-        </p:style>
-        <p:txBody>
-          <a:bodyPr rtlCol="0" anchor="ctr" wrap="square" lIns="182880" tIns="73152"/>
-          <a:lstStyle/>
-          <a:p>
-            <a:pPr algn="ctr">
-              <a:defRPr sz="1300" b="1">
-                <a:solidFill>
-                  <a:srgbClr val="2563EB"/>
-                </a:solidFill>
-                <a:latin typeface="Segoe UI"/>
-              </a:defRPr>
-            </a:pPr>
-            <a:r>
-              <a:t>1. Synthesizable Baseline AES-128 RTL Datapath</a:t>
-            </a:r>
-          </a:p>
+            <a:ext cx="11094415" cy="4663440"/>
+          </a:xfrm>
+          <a:prstGeom prst="rect">
+            <a:avLst/>
+          </a:prstGeom>
+          <a:noFill/>
+        </p:spPr>
+        <p:txBody>
+          <a:bodyPr wrap="square">
+            <a:spAutoFit/>
+          </a:bodyPr>
+          <a:lstStyle/>
           <a:p>
             <a:pPr>
-              <a:defRPr sz="1100">
-                <a:solidFill>
-                  <a:srgbClr val="1E293B"/>
-                </a:solidFill>
-                <a:latin typeface="Segoe UI"/>
-              </a:defRPr>
-            </a:pPr>
-            <a:r>
-              <a:t>Architect an iterative 128-bit AES encryption core in synthesizable Verilog HDL completing 10 rounds in 11 clock cycles. Verify 100% bit-accurate compliance against NIST FIPS 197 reference test vectors.</a:t>
-            </a:r>
-          </a:p>
-        </p:txBody>
-      </p:sp>
-      <p:sp>
-        <p:nvSpPr>
-          <p:cNvPr id="11" name="Rounded Rectangle 10"/>
-          <p:cNvSpPr/>
-          <p:nvPr/>
-        </p:nvSpPr>
-        <p:spPr>
-          <a:xfrm>
-            <a:off x="548640" y="2560320"/>
-            <a:ext cx="11094415" cy="804672"/>
-          </a:xfrm>
-          <a:prstGeom prst="roundRect">
-            <a:avLst/>
-          </a:prstGeom>
-          <a:solidFill>
-            <a:srgbClr val="F8FAFC"/>
-          </a:solidFill>
-          <a:ln w="15240">
-            <a:solidFill>
-              <a:srgbClr val="0F2557"/>
-            </a:solidFill>
-          </a:ln>
-        </p:spPr>
-        <p:style>
-          <a:lnRef idx="1">
-            <a:schemeClr val="accent1"/>
-          </a:lnRef>
-          <a:fillRef idx="3">
-            <a:schemeClr val="accent1"/>
-          </a:fillRef>
-          <a:effectRef idx="2">
-            <a:schemeClr val="accent1"/>
-          </a:effectRef>
-          <a:fontRef idx="minor">
-            <a:schemeClr val="lt1"/>
-          </a:fontRef>
-        </p:style>
-        <p:txBody>
-          <a:bodyPr rtlCol="0" anchor="ctr" wrap="square" lIns="182880" tIns="73152"/>
-          <a:lstStyle/>
-          <a:p>
-            <a:pPr algn="ctr">
-              <a:defRPr sz="1300" b="1">
-                <a:solidFill>
-                  <a:srgbClr val="2563EB"/>
-                </a:solidFill>
-                <a:latin typeface="Segoe UI"/>
-              </a:defRPr>
-            </a:pPr>
-            <a:r>
-              <a:t>2. First-Order Boolean Masked Datapath Implementation</a:t>
+              <a:spcAft>
+                <a:spcPts val="200"/>
+              </a:spcAft>
+            </a:pPr>
+            <a:r>
+              <a:rPr sz="1300" b="1">
+                <a:solidFill>
+                  <a:srgbClr val="0F2557"/>
+                </a:solidFill>
+                <a:latin typeface="Times New Roman"/>
+              </a:rPr>
+              <a:t>• 1. Design &amp; Simulation of Baseline AES-128 RTL Core:</a:t>
             </a:r>
           </a:p>
           <a:p>
             <a:pPr>
-              <a:defRPr sz="1100">
-                <a:solidFill>
-                  <a:srgbClr val="1E293B"/>
-                </a:solidFill>
-                <a:latin typeface="Segoe UI"/>
-              </a:defRPr>
-            </a:pPr>
-            <a:r>
-              <a:t>Implement a dual-share masking architecture (X' = X ⊕ M) across the datapath to break statistical correlation between internal switching power and intermediate cryptographic states.</a:t>
-            </a:r>
-          </a:p>
-        </p:txBody>
-      </p:sp>
-      <p:sp>
-        <p:nvSpPr>
-          <p:cNvPr id="12" name="Rounded Rectangle 11"/>
-          <p:cNvSpPr/>
-          <p:nvPr/>
-        </p:nvSpPr>
-        <p:spPr>
-          <a:xfrm>
-            <a:off x="548640" y="3474720"/>
-            <a:ext cx="11094415" cy="804672"/>
-          </a:xfrm>
-          <a:prstGeom prst="roundRect">
-            <a:avLst/>
-          </a:prstGeom>
-          <a:solidFill>
-            <a:srgbClr val="F8FAFC"/>
-          </a:solidFill>
-          <a:ln w="15240">
-            <a:solidFill>
-              <a:srgbClr val="0F2557"/>
-            </a:solidFill>
-          </a:ln>
-        </p:spPr>
-        <p:style>
-          <a:lnRef idx="1">
-            <a:schemeClr val="accent1"/>
-          </a:lnRef>
-          <a:fillRef idx="3">
-            <a:schemeClr val="accent1"/>
-          </a:fillRef>
-          <a:effectRef idx="2">
-            <a:schemeClr val="accent1"/>
-          </a:effectRef>
-          <a:fontRef idx="minor">
-            <a:schemeClr val="lt1"/>
-          </a:fontRef>
-        </p:style>
-        <p:txBody>
-          <a:bodyPr rtlCol="0" anchor="ctr" wrap="square" lIns="182880" tIns="73152"/>
-          <a:lstStyle/>
-          <a:p>
-            <a:pPr algn="ctr">
-              <a:defRPr sz="1300" b="1">
-                <a:solidFill>
-                  <a:srgbClr val="2563EB"/>
-                </a:solidFill>
-                <a:latin typeface="Segoe UI"/>
-              </a:defRPr>
-            </a:pPr>
-            <a:r>
-              <a:t>3. Glitch-Resistant Masked S-Box &amp; Dynamic Refresh Mechanism</a:t>
+              <a:spcAft>
+                <a:spcPts val="1000"/>
+              </a:spcAft>
+            </a:pPr>
+            <a:r>
+              <a:rPr sz="1150">
+                <a:solidFill>
+                  <a:srgbClr val="1F2937"/>
+                </a:solidFill>
+                <a:latin typeface="Calibri"/>
+              </a:rPr>
+              <a:t>– Develop a synthesizable 128-bit AES encryption core in Verilog HDL and functionally verify it against NIST FIPS 197 test vectors.</a:t>
             </a:r>
           </a:p>
           <a:p>
             <a:pPr>
-              <a:defRPr sz="1100">
-                <a:solidFill>
-                  <a:srgbClr val="1E293B"/>
-                </a:solidFill>
-                <a:latin typeface="Segoe UI"/>
-              </a:defRPr>
-            </a:pPr>
-            <a:r>
-              <a:t>Design a protected non-linear SubBytes transformation with dynamic PRNG mask-refreshing logic to counteract glitch-induced transient leakage and CMOS combinatorial hazards.</a:t>
-            </a:r>
-          </a:p>
-        </p:txBody>
-      </p:sp>
-      <p:sp>
-        <p:nvSpPr>
-          <p:cNvPr id="13" name="Rounded Rectangle 12"/>
-          <p:cNvSpPr/>
-          <p:nvPr/>
-        </p:nvSpPr>
-        <p:spPr>
-          <a:xfrm>
-            <a:off x="548640" y="4389120"/>
-            <a:ext cx="11094415" cy="804672"/>
-          </a:xfrm>
-          <a:prstGeom prst="roundRect">
-            <a:avLst/>
-          </a:prstGeom>
-          <a:solidFill>
-            <a:srgbClr val="F8FAFC"/>
-          </a:solidFill>
-          <a:ln w="15240">
-            <a:solidFill>
-              <a:srgbClr val="0F2557"/>
-            </a:solidFill>
-          </a:ln>
-        </p:spPr>
-        <p:style>
-          <a:lnRef idx="1">
-            <a:schemeClr val="accent1"/>
-          </a:lnRef>
-          <a:fillRef idx="3">
-            <a:schemeClr val="accent1"/>
-          </a:fillRef>
-          <a:effectRef idx="2">
-            <a:schemeClr val="accent1"/>
-          </a:effectRef>
-          <a:fontRef idx="minor">
-            <a:schemeClr val="lt1"/>
-          </a:fontRef>
-        </p:style>
-        <p:txBody>
-          <a:bodyPr rtlCol="0" anchor="ctr" wrap="square" lIns="182880" tIns="73152"/>
-          <a:lstStyle/>
-          <a:p>
-            <a:pPr algn="ctr">
-              <a:defRPr sz="1300" b="1">
-                <a:solidFill>
-                  <a:srgbClr val="2563EB"/>
-                </a:solidFill>
-                <a:latin typeface="Segoe UI"/>
-              </a:defRPr>
-            </a:pPr>
-            <a:r>
-              <a:t>4. AMD-Xilinx Vivado Synthesis &amp; Timing Closure Benchmarking</a:t>
+              <a:spcAft>
+                <a:spcPts val="200"/>
+              </a:spcAft>
+            </a:pPr>
+            <a:r>
+              <a:rPr sz="1300" b="1">
+                <a:solidFill>
+                  <a:srgbClr val="0F2557"/>
+                </a:solidFill>
+                <a:latin typeface="Times New Roman"/>
+              </a:rPr>
+              <a:t>• 2. Implementation of First-Order Boolean Masking Scheme:</a:t>
             </a:r>
           </a:p>
           <a:p>
             <a:pPr>
-              <a:defRPr sz="1100">
-                <a:solidFill>
-                  <a:srgbClr val="1E293B"/>
-                </a:solidFill>
-                <a:latin typeface="Segoe UI"/>
-              </a:defRPr>
-            </a:pPr>
-            <a:r>
-              <a:t>Synthesize both cores targeting the Artix-7 (xc7a35tcsg324-1) FPGA @ 100 MHz constraint in Vivado v2025.2. Extract exact Slice LUTs, Registers, Slack (WNS/WHS), and maximum frequency (Fmax).</a:t>
-            </a:r>
-          </a:p>
-        </p:txBody>
-      </p:sp>
-      <p:sp>
-        <p:nvSpPr>
-          <p:cNvPr id="14" name="Rounded Rectangle 13"/>
-          <p:cNvSpPr/>
-          <p:nvPr/>
-        </p:nvSpPr>
-        <p:spPr>
-          <a:xfrm>
-            <a:off x="548640" y="5303520"/>
-            <a:ext cx="11094415" cy="804672"/>
-          </a:xfrm>
-          <a:prstGeom prst="roundRect">
-            <a:avLst/>
-          </a:prstGeom>
-          <a:solidFill>
-            <a:srgbClr val="F8FAFC"/>
-          </a:solidFill>
-          <a:ln w="15240">
-            <a:solidFill>
-              <a:srgbClr val="0F2557"/>
-            </a:solidFill>
-          </a:ln>
-        </p:spPr>
-        <p:style>
-          <a:lnRef idx="1">
-            <a:schemeClr val="accent1"/>
-          </a:lnRef>
-          <a:fillRef idx="3">
-            <a:schemeClr val="accent1"/>
-          </a:fillRef>
-          <a:effectRef idx="2">
-            <a:schemeClr val="accent1"/>
-          </a:effectRef>
-          <a:fontRef idx="minor">
-            <a:schemeClr val="lt1"/>
-          </a:fontRef>
-        </p:style>
-        <p:txBody>
-          <a:bodyPr rtlCol="0" anchor="ctr" wrap="square" lIns="182880" tIns="73152"/>
-          <a:lstStyle/>
-          <a:p>
-            <a:pPr algn="ctr">
-              <a:defRPr sz="1300" b="1">
-                <a:solidFill>
-                  <a:srgbClr val="2563EB"/>
-                </a:solidFill>
-                <a:latin typeface="Segoe UI"/>
-              </a:defRPr>
-            </a:pPr>
-            <a:r>
-              <a:t>5. Multi-Mode Verification &amp; TVLA Security Framework</a:t>
+              <a:spcAft>
+                <a:spcPts val="1000"/>
+              </a:spcAft>
+            </a:pPr>
+            <a:r>
+              <a:rPr sz="1150">
+                <a:solidFill>
+                  <a:srgbClr val="1F2937"/>
+                </a:solidFill>
+                <a:latin typeface="Calibri"/>
+              </a:rPr>
+              <a:t>– Implement a 2-share Boolean masking architecture (X' = X ⊕ M) across the datapath to decorrelate switching power from secret data.</a:t>
             </a:r>
           </a:p>
           <a:p>
             <a:pPr>
-              <a:defRPr sz="1100">
-                <a:solidFill>
-                  <a:srgbClr val="1E293B"/>
-                </a:solidFill>
-                <a:latin typeface="Segoe UI"/>
-              </a:defRPr>
-            </a:pPr>
-            <a:r>
-              <a:t>Execute behavioral, post-synthesis functional, and post-synthesis timing simulations. Lay the groundwork for statistical Welch's t-test / TVLA validation to guarantee leakage suppression (|t| &lt; 4.5).</a:t>
+              <a:spcAft>
+                <a:spcPts val="200"/>
+              </a:spcAft>
+            </a:pPr>
+            <a:r>
+              <a:rPr sz="1300" b="1">
+                <a:solidFill>
+                  <a:srgbClr val="0F2557"/>
+                </a:solidFill>
+                <a:latin typeface="Times New Roman"/>
+              </a:rPr>
+              <a:t>• 3. Development of Masked S-Box &amp; Dynamic Mask-Refresh Mechanism:</a:t>
+            </a:r>
+          </a:p>
+          <a:p>
+            <a:pPr>
+              <a:spcAft>
+                <a:spcPts val="1000"/>
+              </a:spcAft>
+            </a:pPr>
+            <a:r>
+              <a:rPr sz="1150">
+                <a:solidFill>
+                  <a:srgbClr val="1F2937"/>
+                </a:solidFill>
+                <a:latin typeface="Calibri"/>
+              </a:rPr>
+              <a:t>– Design a protected S-box in composite field GF(((2^2)^2)^2) with mask-refresh logic to prevent glitch-induced first-order leakage.</a:t>
+            </a:r>
+          </a:p>
+          <a:p>
+            <a:pPr>
+              <a:spcAft>
+                <a:spcPts val="200"/>
+              </a:spcAft>
+            </a:pPr>
+            <a:r>
+              <a:rPr sz="1300" b="1">
+                <a:solidFill>
+                  <a:srgbClr val="0F2557"/>
+                </a:solidFill>
+                <a:latin typeface="Times New Roman"/>
+              </a:rPr>
+              <a:t>• 4. Synthesis, Resource Utilization &amp; Timing Benchmarking:</a:t>
+            </a:r>
+          </a:p>
+          <a:p>
+            <a:pPr>
+              <a:spcAft>
+                <a:spcPts val="1000"/>
+              </a:spcAft>
+            </a:pPr>
+            <a:r>
+              <a:rPr sz="1150">
+                <a:solidFill>
+                  <a:srgbClr val="1F2937"/>
+                </a:solidFill>
+                <a:latin typeface="Calibri"/>
+              </a:rPr>
+              <a:t>– Synthesize both baseline and masked designs targeting FPGA in AMD-Xilinx Vivado, comparing LUTs, FFs, BRAMs, Fmax, and power.</a:t>
+            </a:r>
+          </a:p>
+          <a:p>
+            <a:pPr>
+              <a:spcAft>
+                <a:spcPts val="200"/>
+              </a:spcAft>
+            </a:pPr>
+            <a:r>
+              <a:rPr sz="1300" b="1">
+                <a:solidFill>
+                  <a:srgbClr val="0F2557"/>
+                </a:solidFill>
+                <a:latin typeface="Times New Roman"/>
+              </a:rPr>
+              <a:t>• 5. Side-Channel Leakage Assessment &amp; Security Validation:</a:t>
+            </a:r>
+          </a:p>
+          <a:p>
+            <a:pPr>
+              <a:spcAft>
+                <a:spcPts val="1000"/>
+              </a:spcAft>
+            </a:pPr>
+            <a:r>
+              <a:rPr sz="1150">
+                <a:solidFill>
+                  <a:srgbClr val="1F2937"/>
+                </a:solidFill>
+                <a:latin typeface="Calibri"/>
+              </a:rPr>
+              <a:t>– Evaluate side-channel resistance using power-trace analysis and standard Welch's t-test (TVLA) to verify that |t| &lt; 4.5.</a:t>
             </a:r>
           </a:p>
         </p:txBody>
@@ -9732,7 +8778,7 @@
             <a:avLst/>
           </a:prstGeom>
           <a:solidFill>
-            <a:srgbClr val="9CA3AF"/>
+            <a:srgbClr val="A0A0A0"/>
           </a:solidFill>
           <a:ln>
             <a:noFill/>
@@ -9769,7 +8815,7 @@
         <p:spPr>
           <a:xfrm>
             <a:off x="365760" y="868680"/>
-            <a:ext cx="11460175" cy="621792"/>
+            <a:ext cx="11460175" cy="594360"/>
           </a:xfrm>
           <a:prstGeom prst="rect">
             <a:avLst/>
@@ -9804,7 +8850,7 @@
                 <a:solidFill>
                   <a:srgbClr val="FFFFFF"/>
                 </a:solidFill>
-                <a:latin typeface="Segoe UI"/>
+                <a:latin typeface="Times New Roman"/>
               </a:defRPr>
             </a:pPr>
             <a:r>
@@ -9838,9 +8884,9 @@
             <a:pPr>
               <a:defRPr sz="1000">
                 <a:solidFill>
-                  <a:srgbClr val="64748B"/>
-                </a:solidFill>
-                <a:latin typeface="Segoe UI"/>
+                  <a:srgbClr val="6B7280"/>
+                </a:solidFill>
+                <a:latin typeface="Times New Roman"/>
               </a:defRPr>
             </a:pPr>
             <a:r>
@@ -9874,9 +8920,9 @@
             <a:pPr algn="r">
               <a:defRPr sz="1000">
                 <a:solidFill>
-                  <a:srgbClr val="64748B"/>
-                </a:solidFill>
-                <a:latin typeface="Segoe UI"/>
+                  <a:srgbClr val="6B7280"/>
+                </a:solidFill>
+                <a:latin typeface="Times New Roman"/>
               </a:defRPr>
             </a:pPr>
             <a:r>
@@ -9904,12 +8950,12 @@
                 <a:tableStyleId>{5C22544A-7EE6-4342-B048-85BDC9FD1C3A}</a:tableStyleId>
               </a:tblPr>
               <a:tblGrid>
-                <a:gridCol w="548640"/>
+                <a:gridCol w="640080"/>
                 <a:gridCol w="2011680"/>
                 <a:gridCol w="2103120"/>
                 <a:gridCol w="2103120"/>
                 <a:gridCol w="2377440"/>
-                <a:gridCol w="2316175"/>
+                <a:gridCol w="2224735"/>
               </a:tblGrid>
               <a:tr h="1493520">
                 <a:tc>
@@ -9918,11 +8964,11 @@
                     <a:lstStyle/>
                     <a:p>
                       <a:pPr algn="ctr">
-                        <a:defRPr sz="1100" b="1">
+                        <a:defRPr sz="1050" b="1">
                           <a:solidFill>
                             <a:srgbClr val="FFFFFF"/>
                           </a:solidFill>
-                          <a:latin typeface="Segoe UI"/>
+                          <a:latin typeface="Times New Roman"/>
                         </a:defRPr>
                       </a:pPr>
                       <a:r>
@@ -9946,15 +8992,15 @@
                     <a:lstStyle/>
                     <a:p>
                       <a:pPr algn="ctr">
-                        <a:defRPr sz="1100" b="1">
+                        <a:defRPr sz="1050" b="1">
                           <a:solidFill>
                             <a:srgbClr val="FFFFFF"/>
                           </a:solidFill>
-                          <a:latin typeface="Segoe UI"/>
+                          <a:latin typeface="Times New Roman"/>
                         </a:defRPr>
                       </a:pPr>
                       <a:r>
-                        <a:t>Base Paper(s)</a:t>
+                        <a:t>Base Paper (s)</a:t>
                       </a:r>
                       <a:br/>
                       <a:r>
@@ -9974,19 +9020,19 @@
                     <a:lstStyle/>
                     <a:p>
                       <a:pPr algn="ctr">
-                        <a:defRPr sz="1100" b="1">
+                        <a:defRPr sz="1050" b="1">
                           <a:solidFill>
                             <a:srgbClr val="FFFFFF"/>
                           </a:solidFill>
-                          <a:latin typeface="Segoe UI"/>
+                          <a:latin typeface="Times New Roman"/>
                         </a:defRPr>
                       </a:pPr>
                       <a:r>
-                        <a:t>Base Paper(s)</a:t>
+                        <a:t>Base Paper (s) Major</a:t>
                       </a:r>
                       <a:br/>
                       <a:r>
-                        <a:t>Major Findings</a:t>
+                        <a:t>Findings</a:t>
                       </a:r>
                     </a:p>
                   </a:txBody>
@@ -10002,15 +9048,15 @@
                     <a:lstStyle/>
                     <a:p>
                       <a:pPr algn="ctr">
-                        <a:defRPr sz="1100" b="1">
+                        <a:defRPr sz="1050" b="1">
                           <a:solidFill>
                             <a:srgbClr val="FFFFFF"/>
                           </a:solidFill>
-                          <a:latin typeface="Segoe UI"/>
+                          <a:latin typeface="Times New Roman"/>
                         </a:defRPr>
                       </a:pPr>
                       <a:r>
-                        <a:t>Base Paper(s)</a:t>
+                        <a:t>Base Paper (s)</a:t>
                       </a:r>
                       <a:br/>
                       <a:r>
@@ -10030,19 +9076,23 @@
                     <a:lstStyle/>
                     <a:p>
                       <a:pPr algn="ctr">
-                        <a:defRPr sz="1100" b="1">
+                        <a:defRPr sz="1050" b="1">
                           <a:solidFill>
                             <a:srgbClr val="FFFFFF"/>
                           </a:solidFill>
-                          <a:latin typeface="Segoe UI"/>
+                          <a:latin typeface="Times New Roman"/>
                         </a:defRPr>
                       </a:pPr>
                       <a:r>
-                        <a:t>Proposed Improvement</a:t>
+                        <a:t>Proposed</a:t>
                       </a:r>
                       <a:br/>
                       <a:r>
-                        <a:t>over Existing Works</a:t>
+                        <a:t>Improvement over</a:t>
+                      </a:r>
+                      <a:br/>
+                      <a:r>
+                        <a:t>Existing Works</a:t>
                       </a:r>
                     </a:p>
                   </a:txBody>
@@ -10058,11 +9108,11 @@
                     <a:lstStyle/>
                     <a:p>
                       <a:pPr algn="ctr">
-                        <a:defRPr sz="1100" b="1">
+                        <a:defRPr sz="1050" b="1">
                           <a:solidFill>
                             <a:srgbClr val="FFFFFF"/>
                           </a:solidFill>
-                          <a:latin typeface="Segoe UI"/>
+                          <a:latin typeface="Times New Roman"/>
                         </a:defRPr>
                       </a:pPr>
                       <a:r>
@@ -10083,16 +9133,24 @@
                     <a:bodyPr wrap="square"/>
                     <a:lstStyle/>
                     <a:p>
-                      <a:pPr>
-                        <a:defRPr sz="1000">
+                      <a:pPr algn="ctr">
+                        <a:defRPr sz="950" b="1">
                           <a:solidFill>
-                            <a:srgbClr val="1E293B"/>
+                            <a:srgbClr val="1F2937"/>
                           </a:solidFill>
-                          <a:latin typeface="Segoe UI"/>
+                          <a:latin typeface="Times New Roman"/>
                         </a:defRPr>
                       </a:pPr>
                       <a:r>
                         <a:t>1.</a:t>
+                      </a:r>
+                      <a:br/>
+                      <a:r>
+                        <a:t>[Base</a:t>
+                      </a:r>
+                      <a:br/>
+                      <a:r>
+                        <a:t>Paper]</a:t>
                       </a:r>
                     </a:p>
                   </a:txBody>
@@ -10108,11 +9166,11 @@
                     <a:lstStyle/>
                     <a:p>
                       <a:pPr>
-                        <a:defRPr sz="1000">
+                        <a:defRPr sz="950">
                           <a:solidFill>
-                            <a:srgbClr val="1E293B"/>
+                            <a:srgbClr val="1F2937"/>
                           </a:solidFill>
-                          <a:latin typeface="Segoe UI"/>
+                          <a:latin typeface="Calibri"/>
                         </a:defRPr>
                       </a:pPr>
                       <a:r>
@@ -10124,7 +9182,7 @@
                       </a:r>
                       <a:br/>
                       <a:r>
-                        <a:t>'A 7-Gbps SCA-Resistant Multiplicative-Masked AES Engine in Intel 4 CMOS' [BASE PAPER]</a:t>
+                        <a:t>'A 7-Gbps SCA-Resistant Multiplicative-Masked AES Engine in Intel 4 CMOS'</a:t>
                       </a:r>
                     </a:p>
                   </a:txBody>
@@ -10140,23 +9198,19 @@
                     <a:lstStyle/>
                     <a:p>
                       <a:pPr>
-                        <a:defRPr sz="1000">
+                        <a:defRPr sz="950">
                           <a:solidFill>
-                            <a:srgbClr val="1E293B"/>
+                            <a:srgbClr val="1F2937"/>
                           </a:solidFill>
-                          <a:latin typeface="Segoe UI"/>
+                          <a:latin typeface="Calibri"/>
                         </a:defRPr>
                       </a:pPr>
                       <a:r>
-                        <a:t>• Multiplicative-masked AES engine in Intel 4 FinFET CMOS.</a:t>
+                        <a:t>• Multiplicative-masked AES with dual-rail zero-value detection (ZVD).</a:t>
                       </a:r>
                       <a:br/>
                       <a:r>
-                        <a:t>• Dual-rail zero-value detection (ZVD) logic.</a:t>
-                      </a:r>
-                      <a:br/>
-                      <a:r>
-                        <a:t>• Achieved &gt;34,000× MTD improvement against CPA/TVLA.</a:t>
+                        <a:t>• Reported large improvements in measured minimum-time-to-disclosure against power and EM attacks.</a:t>
                       </a:r>
                     </a:p>
                   </a:txBody>
@@ -10172,19 +9226,15 @@
                     <a:lstStyle/>
                     <a:p>
                       <a:pPr>
-                        <a:defRPr sz="1000">
+                        <a:defRPr sz="950">
                           <a:solidFill>
-                            <a:srgbClr val="1E293B"/>
+                            <a:srgbClr val="1F2937"/>
                           </a:solidFill>
-                          <a:latin typeface="Segoe UI"/>
+                          <a:latin typeface="Calibri"/>
                         </a:defRPr>
                       </a:pPr>
                       <a:r>
-                        <a:t>• Fabricated on Intel 4 custom silicon.</a:t>
-                      </a:r>
-                      <a:br/>
-                      <a:r>
-                        <a:t>• Requires specialized dual-rail custom transistor cells not synthesizable in academic FPGA RTL flows.</a:t>
+                        <a:t>• Intel 4 custom silicon and specialized dual-rail implementation are not directly representative of an academic FPGA RTL flow.</a:t>
                       </a:r>
                     </a:p>
                   </a:txBody>
@@ -10200,19 +9250,19 @@
                     <a:lstStyle/>
                     <a:p>
                       <a:pPr>
-                        <a:defRPr sz="1000">
+                        <a:defRPr sz="950">
                           <a:solidFill>
-                            <a:srgbClr val="1E293B"/>
+                            <a:srgbClr val="1F2937"/>
                           </a:solidFill>
-                          <a:latin typeface="Segoe UI"/>
+                          <a:latin typeface="Calibri"/>
                         </a:defRPr>
                       </a:pPr>
                       <a:r>
-                        <a:t>• Implemented a technology-independent synthesizable 1st-order Boolean masked architecture (X' = X ⊕ M) in Verilog HDL.</a:t>
+                        <a:t>• Implemented a synthesizable 1st-order Boolean masked datapath (X' = X ⊕ M) in Verilog HDL.</a:t>
                       </a:r>
                       <a:br/>
                       <a:r>
-                        <a:t>• Mapped to standard FPGA Look-Up Tables (LUTs).</a:t>
+                        <a:t>• Mapped cleanly to standard FPGA logic cells.</a:t>
                       </a:r>
                     </a:p>
                   </a:txBody>
@@ -10228,15 +9278,15 @@
                     <a:lstStyle/>
                     <a:p>
                       <a:pPr>
-                        <a:defRPr sz="1000">
+                        <a:defRPr sz="950">
                           <a:solidFill>
-                            <a:srgbClr val="1E293B"/>
+                            <a:srgbClr val="1F2937"/>
                           </a:solidFill>
-                          <a:latin typeface="Segoe UI"/>
+                          <a:latin typeface="Calibri"/>
                         </a:defRPr>
                       </a:pPr>
                       <a:r>
-                        <a:t>• 100% portable across standard commercial FPGAs (Artix-7).</a:t>
+                        <a:t>• 100% portable across commercial FPGAs (Artix-7).</a:t>
                       </a:r>
                       <a:br/>
                       <a:r>
@@ -10257,12 +9307,12 @@
                     <a:bodyPr wrap="square"/>
                     <a:lstStyle/>
                     <a:p>
-                      <a:pPr>
-                        <a:defRPr sz="1000">
+                      <a:pPr algn="ctr">
+                        <a:defRPr sz="950" b="1">
                           <a:solidFill>
-                            <a:srgbClr val="1E293B"/>
+                            <a:srgbClr val="1F2937"/>
                           </a:solidFill>
-                          <a:latin typeface="Segoe UI"/>
+                          <a:latin typeface="Times New Roman"/>
                         </a:defRPr>
                       </a:pPr>
                       <a:r>
@@ -10282,11 +9332,11 @@
                     <a:lstStyle/>
                     <a:p>
                       <a:pPr>
-                        <a:defRPr sz="1000">
+                        <a:defRPr sz="950">
                           <a:solidFill>
-                            <a:srgbClr val="1E293B"/>
+                            <a:srgbClr val="1F2937"/>
                           </a:solidFill>
-                          <a:latin typeface="Segoe UI"/>
+                          <a:latin typeface="Calibri"/>
                         </a:defRPr>
                       </a:pPr>
                       <a:r>
@@ -10314,11 +9364,11 @@
                     <a:lstStyle/>
                     <a:p>
                       <a:pPr>
-                        <a:defRPr sz="1000">
+                        <a:defRPr sz="950">
                           <a:solidFill>
-                            <a:srgbClr val="1E293B"/>
+                            <a:srgbClr val="1F2937"/>
                           </a:solidFill>
-                          <a:latin typeface="Segoe UI"/>
+                          <a:latin typeface="Calibri"/>
                         </a:defRPr>
                       </a:pPr>
                       <a:r>
@@ -10342,11 +9392,11 @@
                     <a:lstStyle/>
                     <a:p>
                       <a:pPr>
-                        <a:defRPr sz="1000">
+                        <a:defRPr sz="950">
                           <a:solidFill>
-                            <a:srgbClr val="1E293B"/>
+                            <a:srgbClr val="1F2937"/>
                           </a:solidFill>
-                          <a:latin typeface="Segoe UI"/>
+                          <a:latin typeface="Calibri"/>
                         </a:defRPr>
                       </a:pPr>
                       <a:r>
@@ -10366,11 +9416,11 @@
                     <a:lstStyle/>
                     <a:p>
                       <a:pPr>
-                        <a:defRPr sz="1000">
+                        <a:defRPr sz="950">
                           <a:solidFill>
-                            <a:srgbClr val="1E293B"/>
+                            <a:srgbClr val="1F2937"/>
                           </a:solidFill>
-                          <a:latin typeface="Segoe UI"/>
+                          <a:latin typeface="Calibri"/>
                         </a:defRPr>
                       </a:pPr>
                       <a:r>
@@ -10394,11 +9444,11 @@
                     <a:lstStyle/>
                     <a:p>
                       <a:pPr>
-                        <a:defRPr sz="1000">
+                        <a:defRPr sz="950">
                           <a:solidFill>
-                            <a:srgbClr val="1E293B"/>
+                            <a:srgbClr val="1F2937"/>
                           </a:solidFill>
-                          <a:latin typeface="Segoe UI"/>
+                          <a:latin typeface="Calibri"/>
                         </a:defRPr>
                       </a:pPr>
                       <a:r>
@@ -10406,7 +9456,7 @@
                       </a:r>
                       <a:br/>
                       <a:r>
-                        <a:t>• Stable 11-cycle execution latency with line-rate throughput (1.37 Gbps @ 118 MHz) and verifiable algorithmic security.</a:t>
+                        <a:t>• Stable 11-cycle execution latency with line-rate throughput (1.37 Gbps @ 118 MHz) and verifiable security.</a:t>
                       </a:r>
                     </a:p>
                   </a:txBody>
@@ -10588,7 +9638,7 @@
             <a:avLst/>
           </a:prstGeom>
           <a:solidFill>
-            <a:srgbClr val="9CA3AF"/>
+            <a:srgbClr val="A0A0A0"/>
           </a:solidFill>
           <a:ln>
             <a:noFill/>
@@ -10625,7 +9675,7 @@
         <p:spPr>
           <a:xfrm>
             <a:off x="365760" y="868680"/>
-            <a:ext cx="11460175" cy="621792"/>
+            <a:ext cx="11460175" cy="594360"/>
           </a:xfrm>
           <a:prstGeom prst="rect">
             <a:avLst/>
@@ -10660,7 +9710,7 @@
                 <a:solidFill>
                   <a:srgbClr val="FFFFFF"/>
                 </a:solidFill>
-                <a:latin typeface="Segoe UI"/>
+                <a:latin typeface="Times New Roman"/>
               </a:defRPr>
             </a:pPr>
             <a:r>
@@ -10694,9 +9744,9 @@
             <a:pPr>
               <a:defRPr sz="1000">
                 <a:solidFill>
-                  <a:srgbClr val="64748B"/>
-                </a:solidFill>
-                <a:latin typeface="Segoe UI"/>
+                  <a:srgbClr val="6B7280"/>
+                </a:solidFill>
+                <a:latin typeface="Times New Roman"/>
               </a:defRPr>
             </a:pPr>
             <a:r>
@@ -10730,9 +9780,9 @@
             <a:pPr algn="r">
               <a:defRPr sz="1000">
                 <a:solidFill>
-                  <a:srgbClr val="64748B"/>
-                </a:solidFill>
-                <a:latin typeface="Segoe UI"/>
+                  <a:srgbClr val="6B7280"/>
+                </a:solidFill>
+                <a:latin typeface="Times New Roman"/>
               </a:defRPr>
             </a:pPr>
             <a:r>
@@ -10757,8 +9807,8 @@
         </p:blipFill>
         <p:spPr>
           <a:xfrm>
-            <a:off x="548640" y="1645920"/>
-            <a:ext cx="11094415" cy="2958511"/>
+            <a:off x="837590" y="1691640"/>
+            <a:ext cx="10515600" cy="1874519"/>
           </a:xfrm>
           <a:prstGeom prst="rect">
             <a:avLst/>
@@ -10773,8 +9823,8 @@
         </p:nvSpPr>
         <p:spPr>
           <a:xfrm>
-            <a:off x="548640" y="3566160"/>
-            <a:ext cx="11094415" cy="320040"/>
+            <a:off x="837590" y="3611880"/>
+            <a:ext cx="10515600" cy="274320"/>
           </a:xfrm>
           <a:prstGeom prst="rect">
             <a:avLst/>
@@ -10792,7 +9842,7 @@
                 <a:solidFill>
                   <a:srgbClr val="0F2557"/>
                 </a:solidFill>
-                <a:latin typeface="Segoe UI"/>
+                <a:latin typeface="Times New Roman"/>
               </a:defRPr>
             </a:pPr>
             <a:r>
@@ -10817,8 +9867,8 @@
         </p:blipFill>
         <p:spPr>
           <a:xfrm>
-            <a:off x="548640" y="3977639"/>
-            <a:ext cx="11094415" cy="2773604"/>
+            <a:off x="837590" y="3977639"/>
+            <a:ext cx="10515600" cy="1691640"/>
           </a:xfrm>
           <a:prstGeom prst="rect">
             <a:avLst/>
@@ -10833,8 +9883,8 @@
         </p:nvSpPr>
         <p:spPr>
           <a:xfrm>
-            <a:off x="548640" y="5989320"/>
-            <a:ext cx="11094415" cy="320040"/>
+            <a:off x="837590" y="5715000"/>
+            <a:ext cx="10515600" cy="274320"/>
           </a:xfrm>
           <a:prstGeom prst="rect">
             <a:avLst/>
@@ -10852,11 +9902,47 @@
                 <a:solidFill>
                   <a:srgbClr val="0F2557"/>
                 </a:solidFill>
-                <a:latin typeface="Segoe UI"/>
+                <a:latin typeface="Times New Roman"/>
               </a:defRPr>
             </a:pPr>
             <a:r>
               <a:t>Figure 4.2: Four-Stage EDA Engineering Design &amp; Verification Flowchart from Verilog Modeling to Timing Closure</a:t>
+            </a:r>
+          </a:p>
+        </p:txBody>
+      </p:sp>
+      <p:sp>
+        <p:nvSpPr>
+          <p:cNvPr id="14" name="TextBox 13"/>
+          <p:cNvSpPr txBox="1"/>
+          <p:nvPr/>
+        </p:nvSpPr>
+        <p:spPr>
+          <a:xfrm>
+            <a:off x="837590" y="6035040"/>
+            <a:ext cx="10515600" cy="274320"/>
+          </a:xfrm>
+          <a:prstGeom prst="rect">
+            <a:avLst/>
+          </a:prstGeom>
+          <a:noFill/>
+        </p:spPr>
+        <p:txBody>
+          <a:bodyPr wrap="none">
+            <a:spAutoFit/>
+          </a:bodyPr>
+          <a:lstStyle/>
+          <a:p>
+            <a:pPr algn="ctr">
+              <a:defRPr sz="1050">
+                <a:solidFill>
+                  <a:srgbClr val="6B7280"/>
+                </a:solidFill>
+                <a:latin typeface="Calibri"/>
+              </a:defRPr>
+            </a:pPr>
+            <a:r>
+              <a:t>Target Specifications: 128-bit Key &amp; Block | 10 Rounds | 11 Cycles | Target FPGA: AMD-Xilinx Artix-7 (xc7a35tcsg324-1) | EDA Tool: Vivado v2025.2</a:t>
             </a:r>
           </a:p>
         </p:txBody>
@@ -11028,7 +10114,7 @@
             <a:avLst/>
           </a:prstGeom>
           <a:solidFill>
-            <a:srgbClr val="9CA3AF"/>
+            <a:srgbClr val="A0A0A0"/>
           </a:solidFill>
           <a:ln>
             <a:noFill/>
@@ -11065,7 +10151,7 @@
         <p:spPr>
           <a:xfrm>
             <a:off x="365760" y="868680"/>
-            <a:ext cx="11460175" cy="621792"/>
+            <a:ext cx="11460175" cy="594360"/>
           </a:xfrm>
           <a:prstGeom prst="rect">
             <a:avLst/>
@@ -11100,7 +10186,7 @@
                 <a:solidFill>
                   <a:srgbClr val="FFFFFF"/>
                 </a:solidFill>
-                <a:latin typeface="Segoe UI"/>
+                <a:latin typeface="Times New Roman"/>
               </a:defRPr>
             </a:pPr>
             <a:r>
@@ -11134,9 +10220,9 @@
             <a:pPr>
               <a:defRPr sz="1000">
                 <a:solidFill>
-                  <a:srgbClr val="64748B"/>
-                </a:solidFill>
-                <a:latin typeface="Segoe UI"/>
+                  <a:srgbClr val="6B7280"/>
+                </a:solidFill>
+                <a:latin typeface="Times New Roman"/>
               </a:defRPr>
             </a:pPr>
             <a:r>
@@ -11170,9 +10256,9 @@
             <a:pPr algn="r">
               <a:defRPr sz="1000">
                 <a:solidFill>
-                  <a:srgbClr val="64748B"/>
-                </a:solidFill>
-                <a:latin typeface="Segoe UI"/>
+                  <a:srgbClr val="6B7280"/>
+                </a:solidFill>
+                <a:latin typeface="Times New Roman"/>
               </a:defRPr>
             </a:pPr>
             <a:r>
@@ -11197,8 +10283,8 @@
         </p:blipFill>
         <p:spPr>
           <a:xfrm>
-            <a:off x="457200" y="1645920"/>
-            <a:ext cx="5394960" cy="2057400"/>
+            <a:off x="502920" y="1645920"/>
+            <a:ext cx="5303520" cy="1920240"/>
           </a:xfrm>
           <a:prstGeom prst="rect">
             <a:avLst/>
@@ -11213,8 +10299,8 @@
         </p:nvSpPr>
         <p:spPr>
           <a:xfrm>
-            <a:off x="457200" y="3703320"/>
-            <a:ext cx="5394960" cy="274320"/>
+            <a:off x="502920" y="3611880"/>
+            <a:ext cx="5303520" cy="274320"/>
           </a:xfrm>
           <a:prstGeom prst="rect">
             <a:avLst/>
@@ -11228,15 +10314,15 @@
           <a:lstStyle/>
           <a:p>
             <a:pPr>
-              <a:defRPr sz="1000" b="1">
+              <a:defRPr sz="950" b="1">
                 <a:solidFill>
                   <a:srgbClr val="0F2557"/>
                 </a:solidFill>
-                <a:latin typeface="Segoe UI"/>
+                <a:latin typeface="Times New Roman"/>
               </a:defRPr>
             </a:pPr>
             <a:r>
-              <a:t>Figure 5.1: Synthesizable Verilog HDL Module Architecture (rtl/aes_128_masked_core.v)</a:t>
+              <a:t>Figure 5.1: Synthesizable Verilog HDL Masked Datapath Structure (rtl/aes_128_masked_core.v)</a:t>
             </a:r>
           </a:p>
         </p:txBody>
@@ -11257,8 +10343,8 @@
         </p:blipFill>
         <p:spPr>
           <a:xfrm>
-            <a:off x="6126480" y="1645920"/>
-            <a:ext cx="5577840" cy="2057400"/>
+            <a:off x="502920" y="3931920"/>
+            <a:ext cx="5303520" cy="1828800"/>
           </a:xfrm>
           <a:prstGeom prst="rect">
             <a:avLst/>
@@ -11273,8 +10359,8 @@
         </p:nvSpPr>
         <p:spPr>
           <a:xfrm>
-            <a:off x="6126480" y="3703320"/>
-            <a:ext cx="5577840" cy="274320"/>
+            <a:off x="502920" y="5806440"/>
+            <a:ext cx="5303520" cy="274320"/>
           </a:xfrm>
           <a:prstGeom prst="rect">
             <a:avLst/>
@@ -11288,15 +10374,15 @@
           <a:lstStyle/>
           <a:p>
             <a:pPr>
-              <a:defRPr sz="1000" b="1">
+              <a:defRPr sz="950" b="1">
                 <a:solidFill>
                   <a:srgbClr val="0F2557"/>
                 </a:solidFill>
-                <a:latin typeface="Segoe UI"/>
+                <a:latin typeface="Times New Roman"/>
               </a:defRPr>
             </a:pPr>
             <a:r>
-              <a:t>Figure 5.2: AMD-Xilinx Vivado ML v2025.2 XSim Output: 100% NIST FIPS 197 Pass</a:t>
+              <a:t>Figure 5.2: AMD-Xilinx Vivado XSim Functional Verification Output (100% NIST Match)</a:t>
             </a:r>
           </a:p>
         </p:txBody>
@@ -11310,8 +10396,8 @@
           <p:nvPr/>
         </p:nvGraphicFramePr>
         <p:xfrm>
-          <a:off x="457200" y="4069080"/>
-          <a:ext cx="5486400" cy="2011680"/>
+          <a:off x="6126480" y="1645920"/>
+          <a:ext cx="5532120" cy="1920240"/>
         </p:xfrm>
         <a:graphic>
           <a:graphicData uri="http://schemas.openxmlformats.org/drawingml/2006/table">
@@ -11320,12 +10406,12 @@
                 <a:tableStyleId>{5C22544A-7EE6-4342-B048-85BDC9FD1C3A}</a:tableStyleId>
               </a:tblPr>
               <a:tblGrid>
-                <a:gridCol w="2011680"/>
+                <a:gridCol w="1920240"/>
                 <a:gridCol w="1097280"/>
                 <a:gridCol w="1097280"/>
-                <a:gridCol w="1280160"/>
+                <a:gridCol w="1417320"/>
               </a:tblGrid>
-              <a:tr h="335280">
+              <a:tr h="320040">
                 <a:tc>
                   <a:txBody>
                     <a:bodyPr/>
@@ -11336,11 +10422,11 @@
                           <a:solidFill>
                             <a:srgbClr val="FFFFFF"/>
                           </a:solidFill>
-                          <a:latin typeface="Segoe UI"/>
+                          <a:latin typeface="Times New Roman"/>
                         </a:defRPr>
                       </a:pPr>
                       <a:r>
-                        <a:t>Metric / Resource</a:t>
+                        <a:t>Metric / Resource Category</a:t>
                       </a:r>
                     </a:p>
                   </a:txBody>
@@ -11360,11 +10446,11 @@
                           <a:solidFill>
                             <a:srgbClr val="FFFFFF"/>
                           </a:solidFill>
-                          <a:latin typeface="Segoe UI"/>
+                          <a:latin typeface="Times New Roman"/>
                         </a:defRPr>
                       </a:pPr>
                       <a:r>
-                        <a:t>Baseline</a:t>
+                        <a:t>Baseline Core</a:t>
                       </a:r>
                     </a:p>
                   </a:txBody>
@@ -11384,11 +10470,11 @@
                           <a:solidFill>
                             <a:srgbClr val="FFFFFF"/>
                           </a:solidFill>
-                          <a:latin typeface="Segoe UI"/>
+                          <a:latin typeface="Times New Roman"/>
                         </a:defRPr>
                       </a:pPr>
                       <a:r>
-                        <a:t>Masked</a:t>
+                        <a:t>Masked Core</a:t>
                       </a:r>
                     </a:p>
                   </a:txBody>
@@ -11408,7 +10494,7 @@
                           <a:solidFill>
                             <a:srgbClr val="FFFFFF"/>
                           </a:solidFill>
-                          <a:latin typeface="Segoe UI"/>
+                          <a:latin typeface="Times New Roman"/>
                         </a:defRPr>
                       </a:pPr>
                       <a:r>
@@ -11423,7 +10509,7 @@
                   </a:tcPr>
                 </a:tc>
               </a:tr>
-              <a:tr h="335280">
+              <a:tr h="320040">
                 <a:tc>
                   <a:txBody>
                     <a:bodyPr/>
@@ -11432,9 +10518,9 @@
                       <a:pPr>
                         <a:defRPr sz="900">
                           <a:solidFill>
-                            <a:srgbClr val="1E293B"/>
+                            <a:srgbClr val="1F2937"/>
                           </a:solidFill>
-                          <a:latin typeface="Segoe UI"/>
+                          <a:latin typeface="Calibri"/>
                         </a:defRPr>
                       </a:pPr>
                       <a:r>
@@ -11456,9 +10542,9 @@
                       <a:pPr algn="ctr">
                         <a:defRPr sz="900">
                           <a:solidFill>
-                            <a:srgbClr val="1E293B"/>
+                            <a:srgbClr val="1F2937"/>
                           </a:solidFill>
-                          <a:latin typeface="Segoe UI"/>
+                          <a:latin typeface="Calibri"/>
                         </a:defRPr>
                       </a:pPr>
                       <a:r>
@@ -11480,9 +10566,9 @@
                       <a:pPr algn="ctr">
                         <a:defRPr sz="900">
                           <a:solidFill>
-                            <a:srgbClr val="1E293B"/>
+                            <a:srgbClr val="1F2937"/>
                           </a:solidFill>
-                          <a:latin typeface="Segoe UI"/>
+                          <a:latin typeface="Calibri"/>
                         </a:defRPr>
                       </a:pPr>
                       <a:r>
@@ -11504,9 +10590,9 @@
                       <a:pPr algn="ctr">
                         <a:defRPr sz="900">
                           <a:solidFill>
-                            <a:srgbClr val="1E293B"/>
+                            <a:srgbClr val="1F2937"/>
                           </a:solidFill>
-                          <a:latin typeface="Segoe UI"/>
+                          <a:latin typeface="Calibri"/>
                         </a:defRPr>
                       </a:pPr>
                       <a:r>
@@ -11521,7 +10607,7 @@
                   </a:tcPr>
                 </a:tc>
               </a:tr>
-              <a:tr h="335280">
+              <a:tr h="320040">
                 <a:tc>
                   <a:txBody>
                     <a:bodyPr/>
@@ -11530,9 +10616,9 @@
                       <a:pPr>
                         <a:defRPr sz="900">
                           <a:solidFill>
-                            <a:srgbClr val="1E293B"/>
+                            <a:srgbClr val="1F2937"/>
                           </a:solidFill>
-                          <a:latin typeface="Segoe UI"/>
+                          <a:latin typeface="Calibri"/>
                         </a:defRPr>
                       </a:pPr>
                       <a:r>
@@ -11554,9 +10640,9 @@
                       <a:pPr algn="ctr">
                         <a:defRPr sz="900">
                           <a:solidFill>
-                            <a:srgbClr val="1E293B"/>
+                            <a:srgbClr val="1F2937"/>
                           </a:solidFill>
-                          <a:latin typeface="Segoe UI"/>
+                          <a:latin typeface="Calibri"/>
                         </a:defRPr>
                       </a:pPr>
                       <a:r>
@@ -11578,9 +10664,9 @@
                       <a:pPr algn="ctr">
                         <a:defRPr sz="900">
                           <a:solidFill>
-                            <a:srgbClr val="1E293B"/>
+                            <a:srgbClr val="1F2937"/>
                           </a:solidFill>
-                          <a:latin typeface="Segoe UI"/>
+                          <a:latin typeface="Calibri"/>
                         </a:defRPr>
                       </a:pPr>
                       <a:r>
@@ -11602,9 +10688,9 @@
                       <a:pPr algn="ctr">
                         <a:defRPr sz="900">
                           <a:solidFill>
-                            <a:srgbClr val="1E293B"/>
+                            <a:srgbClr val="1F2937"/>
                           </a:solidFill>
-                          <a:latin typeface="Segoe UI"/>
+                          <a:latin typeface="Calibri"/>
                         </a:defRPr>
                       </a:pPr>
                       <a:r>
@@ -11619,7 +10705,7 @@
                   </a:tcPr>
                 </a:tc>
               </a:tr>
-              <a:tr h="335280">
+              <a:tr h="320040">
                 <a:tc>
                   <a:txBody>
                     <a:bodyPr/>
@@ -11628,13 +10714,13 @@
                       <a:pPr>
                         <a:defRPr sz="900">
                           <a:solidFill>
-                            <a:srgbClr val="1E293B"/>
+                            <a:srgbClr val="1F2937"/>
                           </a:solidFill>
-                          <a:latin typeface="Segoe UI"/>
+                          <a:latin typeface="Calibri"/>
                         </a:defRPr>
                       </a:pPr>
                       <a:r>
-                        <a:t>Block RAM / DSP</a:t>
+                        <a:t>Block RAM / DSP Slices</a:t>
                       </a:r>
                     </a:p>
                   </a:txBody>
@@ -11652,9 +10738,9 @@
                       <a:pPr algn="ctr">
                         <a:defRPr sz="900">
                           <a:solidFill>
-                            <a:srgbClr val="1E293B"/>
+                            <a:srgbClr val="1F2937"/>
                           </a:solidFill>
-                          <a:latin typeface="Segoe UI"/>
+                          <a:latin typeface="Calibri"/>
                         </a:defRPr>
                       </a:pPr>
                       <a:r>
@@ -11676,9 +10762,9 @@
                       <a:pPr algn="ctr">
                         <a:defRPr sz="900">
                           <a:solidFill>
-                            <a:srgbClr val="1E293B"/>
+                            <a:srgbClr val="1F2937"/>
                           </a:solidFill>
-                          <a:latin typeface="Segoe UI"/>
+                          <a:latin typeface="Calibri"/>
                         </a:defRPr>
                       </a:pPr>
                       <a:r>
@@ -11700,13 +10786,13 @@
                       <a:pPr algn="ctr">
                         <a:defRPr sz="900">
                           <a:solidFill>
-                            <a:srgbClr val="1E293B"/>
+                            <a:srgbClr val="1F2937"/>
                           </a:solidFill>
-                          <a:latin typeface="Segoe UI"/>
+                          <a:latin typeface="Calibri"/>
                         </a:defRPr>
                       </a:pPr>
                       <a:r>
-                        <a:t>0% (100% Logic)</a:t>
+                        <a:t>0% (Logic Preserved)</a:t>
                       </a:r>
                     </a:p>
                   </a:txBody>
@@ -11717,7 +10803,7 @@
                   </a:tcPr>
                 </a:tc>
               </a:tr>
-              <a:tr h="335280">
+              <a:tr h="320040">
                 <a:tc>
                   <a:txBody>
                     <a:bodyPr/>
@@ -11726,13 +10812,13 @@
                       <a:pPr>
                         <a:defRPr sz="900">
                           <a:solidFill>
-                            <a:srgbClr val="1E293B"/>
+                            <a:srgbClr val="1F2937"/>
                           </a:solidFill>
-                          <a:latin typeface="Segoe UI"/>
+                          <a:latin typeface="Calibri"/>
                         </a:defRPr>
                       </a:pPr>
                       <a:r>
-                        <a:t>Timing Slack (WNS/WHS)</a:t>
+                        <a:t>Timing Slack (WNS / WHS)</a:t>
                       </a:r>
                     </a:p>
                   </a:txBody>
@@ -11750,9 +10836,9 @@
                       <a:pPr algn="ctr">
                         <a:defRPr sz="900">
                           <a:solidFill>
-                            <a:srgbClr val="1E293B"/>
+                            <a:srgbClr val="1F2937"/>
                           </a:solidFill>
-                          <a:latin typeface="Segoe UI"/>
+                          <a:latin typeface="Calibri"/>
                         </a:defRPr>
                       </a:pPr>
                       <a:r>
@@ -11774,9 +10860,9 @@
                       <a:pPr algn="ctr">
                         <a:defRPr sz="900">
                           <a:solidFill>
-                            <a:srgbClr val="1E293B"/>
+                            <a:srgbClr val="1F2937"/>
                           </a:solidFill>
-                          <a:latin typeface="Segoe UI"/>
+                          <a:latin typeface="Calibri"/>
                         </a:defRPr>
                       </a:pPr>
                       <a:r>
@@ -11798,13 +10884,13 @@
                       <a:pPr algn="ctr">
                         <a:defRPr sz="900">
                           <a:solidFill>
-                            <a:srgbClr val="1E293B"/>
+                            <a:srgbClr val="1F2937"/>
                           </a:solidFill>
-                          <a:latin typeface="Segoe UI"/>
+                          <a:latin typeface="Calibri"/>
                         </a:defRPr>
                       </a:pPr>
                       <a:r>
-                        <a:t>PASSED (Clean)</a:t>
+                        <a:t>Setup/Hold Clean</a:t>
                       </a:r>
                     </a:p>
                   </a:txBody>
@@ -11815,7 +10901,7 @@
                   </a:tcPr>
                 </a:tc>
               </a:tr>
-              <a:tr h="335280">
+              <a:tr h="320040">
                 <a:tc>
                   <a:txBody>
                     <a:bodyPr/>
@@ -11824,13 +10910,13 @@
                       <a:pPr>
                         <a:defRPr sz="900">
                           <a:solidFill>
-                            <a:srgbClr val="1E293B"/>
+                            <a:srgbClr val="1F2937"/>
                           </a:solidFill>
-                          <a:latin typeface="Segoe UI"/>
+                          <a:latin typeface="Calibri"/>
                         </a:defRPr>
                       </a:pPr>
                       <a:r>
-                        <a:t>Max Frequency (Fmax)</a:t>
+                        <a:t>Maximum Frequency (Fmax)</a:t>
                       </a:r>
                     </a:p>
                   </a:txBody>
@@ -11848,13 +10934,13 @@
                       <a:pPr algn="ctr">
                         <a:defRPr sz="900">
                           <a:solidFill>
-                            <a:srgbClr val="1E293B"/>
+                            <a:srgbClr val="1F2937"/>
                           </a:solidFill>
-                          <a:latin typeface="Segoe UI"/>
+                          <a:latin typeface="Calibri"/>
                         </a:defRPr>
                       </a:pPr>
                       <a:r>
-                        <a:t>171.3 MHz</a:t>
+                        <a:t>171.30 MHz</a:t>
                       </a:r>
                     </a:p>
                   </a:txBody>
@@ -11872,13 +10958,13 @@
                       <a:pPr algn="ctr">
                         <a:defRPr sz="900">
                           <a:solidFill>
-                            <a:srgbClr val="1E293B"/>
+                            <a:srgbClr val="1F2937"/>
                           </a:solidFill>
-                          <a:latin typeface="Segoe UI"/>
+                          <a:latin typeface="Calibri"/>
                         </a:defRPr>
                       </a:pPr>
                       <a:r>
-                        <a:t>118.2 MHz</a:t>
+                        <a:t>118.20 MHz</a:t>
                       </a:r>
                     </a:p>
                   </a:txBody>
@@ -11896,9 +10982,9 @@
                       <a:pPr algn="ctr">
                         <a:defRPr sz="900">
                           <a:solidFill>
-                            <a:srgbClr val="1E293B"/>
+                            <a:srgbClr val="1F2937"/>
                           </a:solidFill>
-                          <a:latin typeface="Segoe UI"/>
+                          <a:latin typeface="Calibri"/>
                         </a:defRPr>
                       </a:pPr>
                       <a:r>
@@ -11925,8 +11011,8 @@
         </p:nvSpPr>
         <p:spPr>
           <a:xfrm>
-            <a:off x="457200" y="6080760"/>
-            <a:ext cx="5486400" cy="274320"/>
+            <a:off x="6126480" y="3611880"/>
+            <a:ext cx="5532120" cy="274320"/>
           </a:xfrm>
           <a:prstGeom prst="rect">
             <a:avLst/>
@@ -11940,15 +11026,15 @@
           <a:lstStyle/>
           <a:p>
             <a:pPr>
-              <a:defRPr sz="1000" b="1">
+              <a:defRPr sz="950" b="1">
                 <a:solidFill>
                   <a:srgbClr val="0F2557"/>
                 </a:solidFill>
-                <a:latin typeface="Segoe UI"/>
+                <a:latin typeface="Times New Roman"/>
               </a:defRPr>
             </a:pPr>
             <a:r>
-              <a:t>Table 5.1: Comparative Post-Synthesis Hardware Utilization on AMD-Xilinx Artix-7</a:t>
+              <a:t>Table 5.1: Comparative Post-Synthesis Hardware Utilization and Static Timing on Artix-7</a:t>
             </a:r>
           </a:p>
         </p:txBody>
@@ -11969,8 +11055,8 @@
         </p:blipFill>
         <p:spPr>
           <a:xfrm>
-            <a:off x="6126480" y="4069080"/>
-            <a:ext cx="5577840" cy="1965960"/>
+            <a:off x="6126480" y="3931920"/>
+            <a:ext cx="5532120" cy="1828800"/>
           </a:xfrm>
           <a:prstGeom prst="rect">
             <a:avLst/>
@@ -11985,8 +11071,8 @@
         </p:nvSpPr>
         <p:spPr>
           <a:xfrm>
-            <a:off x="6126480" y="6080760"/>
-            <a:ext cx="5577840" cy="274320"/>
+            <a:off x="6126480" y="5806440"/>
+            <a:ext cx="5532120" cy="274320"/>
           </a:xfrm>
           <a:prstGeom prst="rect">
             <a:avLst/>
@@ -12000,15 +11086,51 @@
           <a:lstStyle/>
           <a:p>
             <a:pPr>
-              <a:defRPr sz="1000" b="1">
+              <a:defRPr sz="950" b="1">
                 <a:solidFill>
                   <a:srgbClr val="0F2557"/>
                 </a:solidFill>
-                <a:latin typeface="Segoe UI"/>
+                <a:latin typeface="Times New Roman"/>
               </a:defRPr>
             </a:pPr>
             <a:r>
-              <a:t>Figure 5.3: Verified Post-Synthesis Timing Simulation Waveform (SDF Back-Annotated)</a:t>
+              <a:t>Figure 5.3: Post-Synthesis Timing Simulation Waveform (SDF Gate &amp; Routing Delay Back-Annotated)</a:t>
+            </a:r>
+          </a:p>
+        </p:txBody>
+      </p:sp>
+      <p:sp>
+        <p:nvSpPr>
+          <p:cNvPr id="18" name="TextBox 17"/>
+          <p:cNvSpPr txBox="1"/>
+          <p:nvPr/>
+        </p:nvSpPr>
+        <p:spPr>
+          <a:xfrm>
+            <a:off x="502920" y="6080760"/>
+            <a:ext cx="11155680" cy="274320"/>
+          </a:xfrm>
+          <a:prstGeom prst="rect">
+            <a:avLst/>
+          </a:prstGeom>
+          <a:noFill/>
+        </p:spPr>
+        <p:txBody>
+          <a:bodyPr wrap="none">
+            <a:spAutoFit/>
+          </a:bodyPr>
+          <a:lstStyle/>
+          <a:p>
+            <a:pPr>
+              <a:defRPr sz="950" i="1">
+                <a:solidFill>
+                  <a:srgbClr val="6B7280"/>
+                </a:solidFill>
+                <a:latin typeface="Calibri"/>
+              </a:defRPr>
+            </a:pPr>
+            <a:r>
+              <a:t>Note: Design evaluated purely in EDA software (AMD-Xilinx Vivado v2025.2). Physical FPGA board testing planned for future revisions.</a:t>
             </a:r>
           </a:p>
         </p:txBody>
